--- a/personaforge/presentation/PersonaForge-OCP-Hackathon-2026.pptx
+++ b/personaforge/presentation/PersonaForge-OCP-Hackathon-2026.pptx
@@ -1,6 +1,6 @@
 
 <file path=ppt/presentation.xml><?xml version="1.0" encoding="utf-8"?>
-<p:presentation xmlns:a="http://schemas.openxmlformats.org/drawingml/2006/main" xmlns:r="http://schemas.openxmlformats.org/officeDocument/2006/relationships" xmlns:p="http://schemas.openxmlformats.org/presentationml/2006/main" showSpecialPlsOnTitleSld="0" embedTrueTypeFonts="1" autoCompressPictures="0">
+<p:presentation xmlns:a="http://schemas.openxmlformats.org/drawingml/2006/main" xmlns:r="http://schemas.openxmlformats.org/officeDocument/2006/relationships" xmlns:p="http://schemas.openxmlformats.org/presentationml/2006/main" showSpecialPlsOnTitleSld="0" embedTrueTypeFonts="0" autoCompressPictures="0">
   <p:sldMasterIdLst>
     <p:sldMasterId id="2147483648" r:id="rId1"/>
   </p:sldMasterIdLst>
@@ -18,15 +18,6 @@
   </p:sldIdLst>
   <p:sldSz cx="12192000" cy="6858000"/>
   <p:notesSz cx="6858000" cy="9144000"/>
-  <p:embeddedFontLst>
-    <p:embeddedFont>
-      <p:font typeface="OpenAI Sans" panose="020B0004030202060203" pitchFamily="34" charset="77"/>
-      <p:regular r:id="rId29"/>
-      <p:bold r:id="rId30"/>
-      <p:italic r:id="rId31"/>
-      <p:boldItalic r:id="rId32"/>
-    </p:embeddedFont>
-  </p:embeddedFontLst>
   <p:defaultTextStyle>
     <a:defPPr>
       <a:defRPr lang="en-US"/>
@@ -36,9 +27,9 @@
         <a:solidFill>
           <a:schemeClr val="tx1"/>
         </a:solidFill>
-        <a:latin typeface="+mn-lt"/>
-        <a:ea typeface="+mn-ea"/>
-        <a:cs typeface="+mn-cs"/>
+        <a:latin typeface="Arial"/>
+        <a:ea typeface="Arial"/>
+        <a:cs typeface="Arial"/>
       </a:defRPr>
     </a:lvl1pPr>
     <a:lvl2pPr marL="457200" algn="l" defTabSz="914400" rtl="0" eaLnBrk="1" latinLnBrk="0" hangingPunct="1">
@@ -46,9 +37,9 @@
         <a:solidFill>
           <a:schemeClr val="tx1"/>
         </a:solidFill>
-        <a:latin typeface="+mn-lt"/>
-        <a:ea typeface="+mn-ea"/>
-        <a:cs typeface="+mn-cs"/>
+        <a:latin typeface="Arial"/>
+        <a:ea typeface="Arial"/>
+        <a:cs typeface="Arial"/>
       </a:defRPr>
     </a:lvl2pPr>
     <a:lvl3pPr marL="914400" algn="l" defTabSz="914400" rtl="0" eaLnBrk="1" latinLnBrk="0" hangingPunct="1">
@@ -56,9 +47,9 @@
         <a:solidFill>
           <a:schemeClr val="tx1"/>
         </a:solidFill>
-        <a:latin typeface="+mn-lt"/>
-        <a:ea typeface="+mn-ea"/>
-        <a:cs typeface="+mn-cs"/>
+        <a:latin typeface="Arial"/>
+        <a:ea typeface="Arial"/>
+        <a:cs typeface="Arial"/>
       </a:defRPr>
     </a:lvl3pPr>
     <a:lvl4pPr marL="1371600" algn="l" defTabSz="914400" rtl="0" eaLnBrk="1" latinLnBrk="0" hangingPunct="1">
@@ -66,9 +57,9 @@
         <a:solidFill>
           <a:schemeClr val="tx1"/>
         </a:solidFill>
-        <a:latin typeface="+mn-lt"/>
-        <a:ea typeface="+mn-ea"/>
-        <a:cs typeface="+mn-cs"/>
+        <a:latin typeface="Arial"/>
+        <a:ea typeface="Arial"/>
+        <a:cs typeface="Arial"/>
       </a:defRPr>
     </a:lvl4pPr>
     <a:lvl5pPr marL="1828800" algn="l" defTabSz="914400" rtl="0" eaLnBrk="1" latinLnBrk="0" hangingPunct="1">
@@ -76,9 +67,9 @@
         <a:solidFill>
           <a:schemeClr val="tx1"/>
         </a:solidFill>
-        <a:latin typeface="+mn-lt"/>
-        <a:ea typeface="+mn-ea"/>
-        <a:cs typeface="+mn-cs"/>
+        <a:latin typeface="Arial"/>
+        <a:ea typeface="Arial"/>
+        <a:cs typeface="Arial"/>
       </a:defRPr>
     </a:lvl5pPr>
     <a:lvl6pPr marL="2286000" algn="l" defTabSz="914400" rtl="0" eaLnBrk="1" latinLnBrk="0" hangingPunct="1">
@@ -86,9 +77,9 @@
         <a:solidFill>
           <a:schemeClr val="tx1"/>
         </a:solidFill>
-        <a:latin typeface="+mn-lt"/>
-        <a:ea typeface="+mn-ea"/>
-        <a:cs typeface="+mn-cs"/>
+        <a:latin typeface="Arial"/>
+        <a:ea typeface="Arial"/>
+        <a:cs typeface="Arial"/>
       </a:defRPr>
     </a:lvl6pPr>
     <a:lvl7pPr marL="2743200" algn="l" defTabSz="914400" rtl="0" eaLnBrk="1" latinLnBrk="0" hangingPunct="1">
@@ -96,9 +87,9 @@
         <a:solidFill>
           <a:schemeClr val="tx1"/>
         </a:solidFill>
-        <a:latin typeface="+mn-lt"/>
-        <a:ea typeface="+mn-ea"/>
-        <a:cs typeface="+mn-cs"/>
+        <a:latin typeface="Arial"/>
+        <a:ea typeface="Arial"/>
+        <a:cs typeface="Arial"/>
       </a:defRPr>
     </a:lvl7pPr>
     <a:lvl8pPr marL="3200400" algn="l" defTabSz="914400" rtl="0" eaLnBrk="1" latinLnBrk="0" hangingPunct="1">
@@ -106,9 +97,9 @@
         <a:solidFill>
           <a:schemeClr val="tx1"/>
         </a:solidFill>
-        <a:latin typeface="+mn-lt"/>
-        <a:ea typeface="+mn-ea"/>
-        <a:cs typeface="+mn-cs"/>
+        <a:latin typeface="Arial"/>
+        <a:ea typeface="Arial"/>
+        <a:cs typeface="Arial"/>
       </a:defRPr>
     </a:lvl8pPr>
     <a:lvl9pPr marL="3657600" algn="l" defTabSz="914400" rtl="0" eaLnBrk="1" latinLnBrk="0" hangingPunct="1">
@@ -116,9 +107,9 @@
         <a:solidFill>
           <a:schemeClr val="tx1"/>
         </a:solidFill>
-        <a:latin typeface="+mn-lt"/>
-        <a:ea typeface="+mn-ea"/>
-        <a:cs typeface="+mn-cs"/>
+        <a:latin typeface="Arial"/>
+        <a:ea typeface="Arial"/>
+        <a:cs typeface="Arial"/>
       </a:defRPr>
     </a:lvl9pPr>
   </p:defaultTextStyle>
@@ -390,9 +381,9 @@
         <a:solidFill>
           <a:schemeClr val="tx1"/>
         </a:solidFill>
-        <a:latin typeface="+mn-lt"/>
-        <a:ea typeface="+mn-ea"/>
-        <a:cs typeface="+mn-cs"/>
+        <a:latin typeface="Arial"/>
+        <a:ea typeface="Arial"/>
+        <a:cs typeface="Arial"/>
       </a:defRPr>
     </a:lvl1pPr>
     <a:lvl2pPr marL="457200" algn="l" defTabSz="914400" rtl="0" eaLnBrk="1" latinLnBrk="0" hangingPunct="1">
@@ -400,9 +391,9 @@
         <a:solidFill>
           <a:schemeClr val="tx1"/>
         </a:solidFill>
-        <a:latin typeface="+mn-lt"/>
-        <a:ea typeface="+mn-ea"/>
-        <a:cs typeface="+mn-cs"/>
+        <a:latin typeface="Arial"/>
+        <a:ea typeface="Arial"/>
+        <a:cs typeface="Arial"/>
       </a:defRPr>
     </a:lvl2pPr>
     <a:lvl3pPr marL="914400" algn="l" defTabSz="914400" rtl="0" eaLnBrk="1" latinLnBrk="0" hangingPunct="1">
@@ -410,9 +401,9 @@
         <a:solidFill>
           <a:schemeClr val="tx1"/>
         </a:solidFill>
-        <a:latin typeface="+mn-lt"/>
-        <a:ea typeface="+mn-ea"/>
-        <a:cs typeface="+mn-cs"/>
+        <a:latin typeface="Arial"/>
+        <a:ea typeface="Arial"/>
+        <a:cs typeface="Arial"/>
       </a:defRPr>
     </a:lvl3pPr>
     <a:lvl4pPr marL="1371600" algn="l" defTabSz="914400" rtl="0" eaLnBrk="1" latinLnBrk="0" hangingPunct="1">
@@ -420,9 +411,9 @@
         <a:solidFill>
           <a:schemeClr val="tx1"/>
         </a:solidFill>
-        <a:latin typeface="+mn-lt"/>
-        <a:ea typeface="+mn-ea"/>
-        <a:cs typeface="+mn-cs"/>
+        <a:latin typeface="Arial"/>
+        <a:ea typeface="Arial"/>
+        <a:cs typeface="Arial"/>
       </a:defRPr>
     </a:lvl4pPr>
     <a:lvl5pPr marL="1828800" algn="l" defTabSz="914400" rtl="0" eaLnBrk="1" latinLnBrk="0" hangingPunct="1">
@@ -430,9 +421,9 @@
         <a:solidFill>
           <a:schemeClr val="tx1"/>
         </a:solidFill>
-        <a:latin typeface="+mn-lt"/>
-        <a:ea typeface="+mn-ea"/>
-        <a:cs typeface="+mn-cs"/>
+        <a:latin typeface="Arial"/>
+        <a:ea typeface="Arial"/>
+        <a:cs typeface="Arial"/>
       </a:defRPr>
     </a:lvl5pPr>
     <a:lvl6pPr marL="2286000" algn="l" defTabSz="914400" rtl="0" eaLnBrk="1" latinLnBrk="0" hangingPunct="1">
@@ -440,9 +431,9 @@
         <a:solidFill>
           <a:schemeClr val="tx1"/>
         </a:solidFill>
-        <a:latin typeface="+mn-lt"/>
-        <a:ea typeface="+mn-ea"/>
-        <a:cs typeface="+mn-cs"/>
+        <a:latin typeface="Arial"/>
+        <a:ea typeface="Arial"/>
+        <a:cs typeface="Arial"/>
       </a:defRPr>
     </a:lvl6pPr>
     <a:lvl7pPr marL="2743200" algn="l" defTabSz="914400" rtl="0" eaLnBrk="1" latinLnBrk="0" hangingPunct="1">
@@ -450,9 +441,9 @@
         <a:solidFill>
           <a:schemeClr val="tx1"/>
         </a:solidFill>
-        <a:latin typeface="+mn-lt"/>
-        <a:ea typeface="+mn-ea"/>
-        <a:cs typeface="+mn-cs"/>
+        <a:latin typeface="Arial"/>
+        <a:ea typeface="Arial"/>
+        <a:cs typeface="Arial"/>
       </a:defRPr>
     </a:lvl7pPr>
     <a:lvl8pPr marL="3200400" algn="l" defTabSz="914400" rtl="0" eaLnBrk="1" latinLnBrk="0" hangingPunct="1">
@@ -460,9 +451,9 @@
         <a:solidFill>
           <a:schemeClr val="tx1"/>
         </a:solidFill>
-        <a:latin typeface="+mn-lt"/>
-        <a:ea typeface="+mn-ea"/>
-        <a:cs typeface="+mn-cs"/>
+        <a:latin typeface="Arial"/>
+        <a:ea typeface="Arial"/>
+        <a:cs typeface="Arial"/>
       </a:defRPr>
     </a:lvl8pPr>
     <a:lvl9pPr marL="3657600" algn="l" defTabSz="914400" rtl="0" eaLnBrk="1" latinLnBrk="0" hangingPunct="1">
@@ -470,9 +461,9 @@
         <a:solidFill>
           <a:schemeClr val="tx1"/>
         </a:solidFill>
-        <a:latin typeface="+mn-lt"/>
-        <a:ea typeface="+mn-ea"/>
-        <a:cs typeface="+mn-cs"/>
+        <a:latin typeface="Arial"/>
+        <a:ea typeface="Arial"/>
+        <a:cs typeface="Arial"/>
       </a:defRPr>
     </a:lvl9pPr>
   </p:notesStyle>
@@ -774,9 +765,9 @@
                 <a:solidFill>
                   <a:schemeClr val="tx1"/>
                 </a:solidFill>
-                <a:latin typeface="+mn-lt"/>
-                <a:ea typeface="+mn-ea"/>
-                <a:cs typeface="+mn-cs"/>
+                <a:latin typeface="Arial"/>
+                <a:ea typeface="Arial"/>
+                <a:cs typeface="Arial"/>
               </a:defRPr>
             </a:lvl1pPr>
           </a:lstStyle>
@@ -999,9 +990,9 @@
                 <a:solidFill>
                   <a:schemeClr val="tx1"/>
                 </a:solidFill>
-                <a:latin typeface="+mn-lt"/>
-                <a:ea typeface="+mn-ea"/>
-                <a:cs typeface="+mn-cs"/>
+                <a:latin typeface="Arial"/>
+                <a:ea typeface="Arial"/>
+                <a:cs typeface="Arial"/>
               </a:defRPr>
             </a:lvl1pPr>
           </a:lstStyle>
@@ -1291,9 +1282,9 @@
                 <a:solidFill>
                   <a:schemeClr val="tx1"/>
                 </a:solidFill>
-                <a:latin typeface="+mn-lt"/>
-                <a:ea typeface="+mn-ea"/>
-                <a:cs typeface="+mn-cs"/>
+                <a:latin typeface="Arial"/>
+                <a:ea typeface="Arial"/>
+                <a:cs typeface="Arial"/>
               </a:defRPr>
             </a:lvl1pPr>
           </a:lstStyle>
@@ -1643,9 +1634,9 @@
                 <a:solidFill>
                   <a:schemeClr val="tx1"/>
                 </a:solidFill>
-                <a:latin typeface="+mn-lt"/>
-                <a:ea typeface="+mn-ea"/>
-                <a:cs typeface="+mn-cs"/>
+                <a:latin typeface="Arial"/>
+                <a:ea typeface="Arial"/>
+                <a:cs typeface="Arial"/>
               </a:defRPr>
             </a:lvl1pPr>
           </a:lstStyle>
@@ -1971,9 +1962,9 @@
                 <a:solidFill>
                   <a:schemeClr val="tx1"/>
                 </a:solidFill>
-                <a:latin typeface="+mn-lt"/>
-                <a:ea typeface="+mn-ea"/>
-                <a:cs typeface="+mn-cs"/>
+                <a:latin typeface="Arial"/>
+                <a:ea typeface="Arial"/>
+                <a:cs typeface="Arial"/>
               </a:defRPr>
             </a:lvl1pPr>
           </a:lstStyle>
@@ -2129,9 +2120,9 @@
                 <a:solidFill>
                   <a:schemeClr val="tx1"/>
                 </a:solidFill>
-                <a:latin typeface="+mn-lt"/>
-                <a:ea typeface="+mn-ea"/>
-                <a:cs typeface="+mn-cs"/>
+                <a:latin typeface="Arial"/>
+                <a:ea typeface="Arial"/>
+                <a:cs typeface="Arial"/>
               </a:defRPr>
             </a:lvl1pPr>
           </a:lstStyle>
@@ -2394,9 +2385,9 @@
                 <a:solidFill>
                   <a:schemeClr val="tx1"/>
                 </a:solidFill>
-                <a:latin typeface="+mn-lt"/>
-                <a:ea typeface="+mn-ea"/>
-                <a:cs typeface="+mn-cs"/>
+                <a:latin typeface="Arial"/>
+                <a:ea typeface="Arial"/>
+                <a:cs typeface="Arial"/>
               </a:defRPr>
             </a:lvl1pPr>
           </a:lstStyle>
@@ -2443,9 +2434,9 @@
           <a:solidFill>
             <a:schemeClr val="tx1"/>
           </a:solidFill>
-          <a:latin typeface="+mj-lt"/>
-          <a:ea typeface="+mj-ea"/>
-          <a:cs typeface="+mj-cs"/>
+          <a:latin typeface="Arial"/>
+          <a:ea typeface="Arial"/>
+          <a:cs typeface="Arial"/>
         </a:defRPr>
       </a:lvl1pPr>
     </p:titleStyle>
@@ -2457,15 +2448,15 @@
         <a:spcBef>
           <a:spcPts val="1000"/>
         </a:spcBef>
-        <a:buFont typeface="Arial" panose="020B0604020202020204" pitchFamily="34" charset="0"/>
+        <a:buFont typeface="Arial"/>
         <a:buChar char="•"/>
         <a:defRPr sz="2400" kern="1200">
           <a:solidFill>
             <a:schemeClr val="tx1"/>
           </a:solidFill>
-          <a:latin typeface="+mn-lt"/>
-          <a:ea typeface="+mn-ea"/>
-          <a:cs typeface="+mn-cs"/>
+          <a:latin typeface="Arial"/>
+          <a:ea typeface="Arial"/>
+          <a:cs typeface="Arial"/>
         </a:defRPr>
       </a:lvl1pPr>
       <a:lvl2pPr marL="685800" indent="-228600" algn="l" defTabSz="914400" rtl="0" eaLnBrk="1" latinLnBrk="0" hangingPunct="1">
@@ -2475,15 +2466,15 @@
         <a:spcBef>
           <a:spcPts val="500"/>
         </a:spcBef>
-        <a:buFont typeface="Arial" panose="020B0604020202020204" pitchFamily="34" charset="0"/>
+        <a:buFont typeface="Arial"/>
         <a:buChar char="•"/>
         <a:defRPr sz="2000" kern="1200">
           <a:solidFill>
             <a:schemeClr val="tx1"/>
           </a:solidFill>
-          <a:latin typeface="+mn-lt"/>
-          <a:ea typeface="+mn-ea"/>
-          <a:cs typeface="+mn-cs"/>
+          <a:latin typeface="Arial"/>
+          <a:ea typeface="Arial"/>
+          <a:cs typeface="Arial"/>
         </a:defRPr>
       </a:lvl2pPr>
       <a:lvl3pPr marL="1143000" indent="-228600" algn="l" defTabSz="914400" rtl="0" eaLnBrk="1" latinLnBrk="0" hangingPunct="1">
@@ -2493,15 +2484,15 @@
         <a:spcBef>
           <a:spcPts val="500"/>
         </a:spcBef>
-        <a:buFont typeface="Arial" panose="020B0604020202020204" pitchFamily="34" charset="0"/>
+        <a:buFont typeface="Arial"/>
         <a:buChar char="•"/>
         <a:defRPr sz="1800" kern="1200">
           <a:solidFill>
             <a:schemeClr val="tx1"/>
           </a:solidFill>
-          <a:latin typeface="+mn-lt"/>
-          <a:ea typeface="+mn-ea"/>
-          <a:cs typeface="+mn-cs"/>
+          <a:latin typeface="Arial"/>
+          <a:ea typeface="Arial"/>
+          <a:cs typeface="Arial"/>
         </a:defRPr>
       </a:lvl3pPr>
       <a:lvl4pPr marL="1600200" indent="-228600" algn="l" defTabSz="914400" rtl="0" eaLnBrk="1" latinLnBrk="0" hangingPunct="1">
@@ -2511,15 +2502,15 @@
         <a:spcBef>
           <a:spcPts val="500"/>
         </a:spcBef>
-        <a:buFont typeface="Arial" panose="020B0604020202020204" pitchFamily="34" charset="0"/>
+        <a:buFont typeface="Arial"/>
         <a:buChar char="•"/>
         <a:defRPr sz="1800" kern="1200">
           <a:solidFill>
             <a:schemeClr val="tx1"/>
           </a:solidFill>
-          <a:latin typeface="+mn-lt"/>
-          <a:ea typeface="+mn-ea"/>
-          <a:cs typeface="+mn-cs"/>
+          <a:latin typeface="Arial"/>
+          <a:ea typeface="Arial"/>
+          <a:cs typeface="Arial"/>
         </a:defRPr>
       </a:lvl4pPr>
       <a:lvl5pPr marL="2057400" indent="-228600" algn="l" defTabSz="914400" rtl="0" eaLnBrk="1" latinLnBrk="0" hangingPunct="1">
@@ -2529,15 +2520,15 @@
         <a:spcBef>
           <a:spcPts val="500"/>
         </a:spcBef>
-        <a:buFont typeface="Arial" panose="020B0604020202020204" pitchFamily="34" charset="0"/>
+        <a:buFont typeface="Arial"/>
         <a:buChar char="•"/>
         <a:defRPr sz="1800" kern="1200">
           <a:solidFill>
             <a:schemeClr val="tx1"/>
           </a:solidFill>
-          <a:latin typeface="+mn-lt"/>
-          <a:ea typeface="+mn-ea"/>
-          <a:cs typeface="+mn-cs"/>
+          <a:latin typeface="Arial"/>
+          <a:ea typeface="Arial"/>
+          <a:cs typeface="Arial"/>
         </a:defRPr>
       </a:lvl5pPr>
       <a:lvl6pPr marL="2514600" indent="-228600" algn="l" defTabSz="914400" rtl="0" eaLnBrk="1" latinLnBrk="0" hangingPunct="1">
@@ -2547,15 +2538,15 @@
         <a:spcBef>
           <a:spcPts val="500"/>
         </a:spcBef>
-        <a:buFont typeface="Arial" panose="020B0604020202020204" pitchFamily="34" charset="0"/>
+        <a:buFont typeface="Arial"/>
         <a:buChar char="•"/>
         <a:defRPr sz="1800" kern="1200">
           <a:solidFill>
             <a:schemeClr val="tx1"/>
           </a:solidFill>
-          <a:latin typeface="+mn-lt"/>
-          <a:ea typeface="+mn-ea"/>
-          <a:cs typeface="+mn-cs"/>
+          <a:latin typeface="Arial"/>
+          <a:ea typeface="Arial"/>
+          <a:cs typeface="Arial"/>
         </a:defRPr>
       </a:lvl6pPr>
       <a:lvl7pPr marL="2971800" indent="-228600" algn="l" defTabSz="914400" rtl="0" eaLnBrk="1" latinLnBrk="0" hangingPunct="1">
@@ -2565,15 +2556,15 @@
         <a:spcBef>
           <a:spcPts val="500"/>
         </a:spcBef>
-        <a:buFont typeface="Arial" panose="020B0604020202020204" pitchFamily="34" charset="0"/>
+        <a:buFont typeface="Arial"/>
         <a:buChar char="•"/>
         <a:defRPr sz="1800" kern="1200">
           <a:solidFill>
             <a:schemeClr val="tx1"/>
           </a:solidFill>
-          <a:latin typeface="+mn-lt"/>
-          <a:ea typeface="+mn-ea"/>
-          <a:cs typeface="+mn-cs"/>
+          <a:latin typeface="Arial"/>
+          <a:ea typeface="Arial"/>
+          <a:cs typeface="Arial"/>
         </a:defRPr>
       </a:lvl7pPr>
       <a:lvl8pPr marL="3429000" indent="-228600" algn="l" defTabSz="914400" rtl="0" eaLnBrk="1" latinLnBrk="0" hangingPunct="1">
@@ -2583,15 +2574,15 @@
         <a:spcBef>
           <a:spcPts val="500"/>
         </a:spcBef>
-        <a:buFont typeface="Arial" panose="020B0604020202020204" pitchFamily="34" charset="0"/>
+        <a:buFont typeface="Arial"/>
         <a:buChar char="•"/>
         <a:defRPr sz="1800" kern="1200">
           <a:solidFill>
             <a:schemeClr val="tx1"/>
           </a:solidFill>
-          <a:latin typeface="+mn-lt"/>
-          <a:ea typeface="+mn-ea"/>
-          <a:cs typeface="+mn-cs"/>
+          <a:latin typeface="Arial"/>
+          <a:ea typeface="Arial"/>
+          <a:cs typeface="Arial"/>
         </a:defRPr>
       </a:lvl8pPr>
       <a:lvl9pPr marL="3886200" indent="-228600" algn="l" defTabSz="914400" rtl="0" eaLnBrk="1" latinLnBrk="0" hangingPunct="1">
@@ -2601,15 +2592,15 @@
         <a:spcBef>
           <a:spcPts val="500"/>
         </a:spcBef>
-        <a:buFont typeface="Arial" panose="020B0604020202020204" pitchFamily="34" charset="0"/>
+        <a:buFont typeface="Arial"/>
         <a:buChar char="•"/>
         <a:defRPr sz="1800" kern="1200">
           <a:solidFill>
             <a:schemeClr val="tx1"/>
           </a:solidFill>
-          <a:latin typeface="+mn-lt"/>
-          <a:ea typeface="+mn-ea"/>
-          <a:cs typeface="+mn-cs"/>
+          <a:latin typeface="Arial"/>
+          <a:ea typeface="Arial"/>
+          <a:cs typeface="Arial"/>
         </a:defRPr>
       </a:lvl9pPr>
     </p:bodyStyle>
@@ -2622,9 +2613,9 @@
           <a:solidFill>
             <a:schemeClr val="tx1"/>
           </a:solidFill>
-          <a:latin typeface="+mn-lt"/>
-          <a:ea typeface="+mn-ea"/>
-          <a:cs typeface="+mn-cs"/>
+          <a:latin typeface="Arial"/>
+          <a:ea typeface="Arial"/>
+          <a:cs typeface="Arial"/>
         </a:defRPr>
       </a:lvl1pPr>
       <a:lvl2pPr marL="457200" algn="l" defTabSz="914400" rtl="0" eaLnBrk="1" latinLnBrk="0" hangingPunct="1">
@@ -2632,9 +2623,9 @@
           <a:solidFill>
             <a:schemeClr val="tx1"/>
           </a:solidFill>
-          <a:latin typeface="+mn-lt"/>
-          <a:ea typeface="+mn-ea"/>
-          <a:cs typeface="+mn-cs"/>
+          <a:latin typeface="Arial"/>
+          <a:ea typeface="Arial"/>
+          <a:cs typeface="Arial"/>
         </a:defRPr>
       </a:lvl2pPr>
       <a:lvl3pPr marL="914400" algn="l" defTabSz="914400" rtl="0" eaLnBrk="1" latinLnBrk="0" hangingPunct="1">
@@ -2642,9 +2633,9 @@
           <a:solidFill>
             <a:schemeClr val="tx1"/>
           </a:solidFill>
-          <a:latin typeface="+mn-lt"/>
-          <a:ea typeface="+mn-ea"/>
-          <a:cs typeface="+mn-cs"/>
+          <a:latin typeface="Arial"/>
+          <a:ea typeface="Arial"/>
+          <a:cs typeface="Arial"/>
         </a:defRPr>
       </a:lvl3pPr>
       <a:lvl4pPr marL="1371600" algn="l" defTabSz="914400" rtl="0" eaLnBrk="1" latinLnBrk="0" hangingPunct="1">
@@ -2652,9 +2643,9 @@
           <a:solidFill>
             <a:schemeClr val="tx1"/>
           </a:solidFill>
-          <a:latin typeface="+mn-lt"/>
-          <a:ea typeface="+mn-ea"/>
-          <a:cs typeface="+mn-cs"/>
+          <a:latin typeface="Arial"/>
+          <a:ea typeface="Arial"/>
+          <a:cs typeface="Arial"/>
         </a:defRPr>
       </a:lvl4pPr>
       <a:lvl5pPr marL="1828800" algn="l" defTabSz="914400" rtl="0" eaLnBrk="1" latinLnBrk="0" hangingPunct="1">
@@ -2662,9 +2653,9 @@
           <a:solidFill>
             <a:schemeClr val="tx1"/>
           </a:solidFill>
-          <a:latin typeface="+mn-lt"/>
-          <a:ea typeface="+mn-ea"/>
-          <a:cs typeface="+mn-cs"/>
+          <a:latin typeface="Arial"/>
+          <a:ea typeface="Arial"/>
+          <a:cs typeface="Arial"/>
         </a:defRPr>
       </a:lvl5pPr>
       <a:lvl6pPr marL="2286000" algn="l" defTabSz="914400" rtl="0" eaLnBrk="1" latinLnBrk="0" hangingPunct="1">
@@ -2672,9 +2663,9 @@
           <a:solidFill>
             <a:schemeClr val="tx1"/>
           </a:solidFill>
-          <a:latin typeface="+mn-lt"/>
-          <a:ea typeface="+mn-ea"/>
-          <a:cs typeface="+mn-cs"/>
+          <a:latin typeface="Arial"/>
+          <a:ea typeface="Arial"/>
+          <a:cs typeface="Arial"/>
         </a:defRPr>
       </a:lvl6pPr>
       <a:lvl7pPr marL="2743200" algn="l" defTabSz="914400" rtl="0" eaLnBrk="1" latinLnBrk="0" hangingPunct="1">
@@ -2682,9 +2673,9 @@
           <a:solidFill>
             <a:schemeClr val="tx1"/>
           </a:solidFill>
-          <a:latin typeface="+mn-lt"/>
-          <a:ea typeface="+mn-ea"/>
-          <a:cs typeface="+mn-cs"/>
+          <a:latin typeface="Arial"/>
+          <a:ea typeface="Arial"/>
+          <a:cs typeface="Arial"/>
         </a:defRPr>
       </a:lvl7pPr>
       <a:lvl8pPr marL="3200400" algn="l" defTabSz="914400" rtl="0" eaLnBrk="1" latinLnBrk="0" hangingPunct="1">
@@ -2692,9 +2683,9 @@
           <a:solidFill>
             <a:schemeClr val="tx1"/>
           </a:solidFill>
-          <a:latin typeface="+mn-lt"/>
-          <a:ea typeface="+mn-ea"/>
-          <a:cs typeface="+mn-cs"/>
+          <a:latin typeface="Arial"/>
+          <a:ea typeface="Arial"/>
+          <a:cs typeface="Arial"/>
         </a:defRPr>
       </a:lvl8pPr>
       <a:lvl9pPr marL="3657600" algn="l" defTabSz="914400" rtl="0" eaLnBrk="1" latinLnBrk="0" hangingPunct="1">
@@ -2702,9 +2693,9 @@
           <a:solidFill>
             <a:schemeClr val="tx1"/>
           </a:solidFill>
-          <a:latin typeface="+mn-lt"/>
-          <a:ea typeface="+mn-ea"/>
-          <a:cs typeface="+mn-cs"/>
+          <a:latin typeface="Arial"/>
+          <a:ea typeface="Arial"/>
+          <a:cs typeface="Arial"/>
         </a:defRPr>
       </a:lvl9pPr>
     </p:otherStyle>
@@ -2930,7 +2921,7 @@
                 <a:solidFill>
                   <a:srgbClr val="00B8D7"/>
                 </a:solidFill>
-                <a:latin typeface="Aptos"/>
+                <a:latin typeface="Arial"/>
               </a:rPr>
               <a:t>OCP HACKATHON 2026</a:t>
             </a:r>
@@ -2967,7 +2958,7 @@
                 <a:solidFill>
                   <a:srgbClr val="08172F"/>
                 </a:solidFill>
-                <a:latin typeface="Aptos"/>
+                <a:latin typeface="Arial"/>
               </a:rPr>
               <a:t>PersonaForge</a:t>
             </a:r>
@@ -3004,7 +2995,7 @@
                 <a:solidFill>
                   <a:srgbClr val="34383D"/>
                 </a:solidFill>
-                <a:latin typeface="Aptos"/>
+                <a:latin typeface="Arial"/>
               </a:rPr>
               <a:t>Purpose-built SONiC.</a:t>
             </a:r>
@@ -3017,7 +3008,7 @@
                 <a:solidFill>
                   <a:srgbClr val="687985"/>
                 </a:solidFill>
-                <a:latin typeface="Aptos"/>
+                <a:latin typeface="Arial"/>
               </a:rPr>
               <a:t>One persona. Build lean. Adapt at runtime.</a:t>
             </a:r>
@@ -3056,7 +3047,7 @@
                 <a:solidFill>
                   <a:srgbClr val="08172F"/>
                 </a:solidFill>
-                <a:latin typeface="Aptos"/>
+                <a:latin typeface="Arial"/>
               </a:rPr>
               <a:t>CATEGORY: Developer experience improvements: builds, CI/CD</a:t>
             </a:r>
@@ -3088,6 +3079,7 @@
         <p:txBody>
           <a:bodyPr wrap="square" lIns="0" rIns="0" tIns="0" bIns="0" anchor="t"/>
           <a:lstStyle/>
+          <a:p/>
         </p:txBody>
       </p:sp>
       <p:sp>
@@ -3119,7 +3111,7 @@
                 <a:solidFill>
                   <a:srgbClr val="009B77"/>
                 </a:solidFill>
-                <a:latin typeface="Aptos"/>
+                <a:latin typeface="Arial"/>
               </a:rPr>
               <a:t>TEAM • Dell Technologies</a:t>
             </a:r>
@@ -3156,7 +3148,7 @@
                 <a:solidFill>
                   <a:srgbClr val="34383D"/>
                 </a:solidFill>
-                <a:latin typeface="Aptos"/>
+                <a:latin typeface="Arial"/>
               </a:rPr>
               <a:t>Rathnasabapathy Velautharaj</a:t>
             </a:r>
@@ -3169,7 +3161,7 @@
                 <a:solidFill>
                   <a:srgbClr val="687985"/>
                 </a:solidFill>
-                <a:latin typeface="Aptos"/>
+                <a:latin typeface="Arial"/>
               </a:rPr>
               <a:t>Rathna.Sabapathy@dell.com</a:t>
             </a:r>
@@ -3206,7 +3198,7 @@
                 <a:solidFill>
                   <a:srgbClr val="34383D"/>
                 </a:solidFill>
-                <a:latin typeface="Aptos"/>
+                <a:latin typeface="Arial"/>
               </a:rPr>
               <a:t>Phaniraj Vattem</a:t>
             </a:r>
@@ -3219,7 +3211,7 @@
                 <a:solidFill>
                   <a:srgbClr val="687985"/>
                 </a:solidFill>
-                <a:latin typeface="Aptos"/>
+                <a:latin typeface="Arial"/>
               </a:rPr>
               <a:t>Phaniraj.Vattem@dell.com</a:t>
             </a:r>
@@ -3256,7 +3248,7 @@
                 <a:solidFill>
                   <a:srgbClr val="34383D"/>
                 </a:solidFill>
-                <a:latin typeface="Aptos"/>
+                <a:latin typeface="Arial"/>
               </a:rPr>
               <a:t>Maheshwara Hampasagar</a:t>
             </a:r>
@@ -3269,7 +3261,7 @@
                 <a:solidFill>
                   <a:srgbClr val="687985"/>
                 </a:solidFill>
-                <a:latin typeface="Aptos"/>
+                <a:latin typeface="Arial"/>
               </a:rPr>
               <a:t>Maheshwara.Hampasaga@dell.com</a:t>
             </a:r>
@@ -3306,7 +3298,7 @@
                 <a:solidFill>
                   <a:srgbClr val="34383D"/>
                 </a:solidFill>
-                <a:latin typeface="Aptos"/>
+                <a:latin typeface="Arial"/>
               </a:rPr>
               <a:t>Tejaswi Goel</a:t>
             </a:r>
@@ -3319,7 +3311,7 @@
                 <a:solidFill>
                   <a:srgbClr val="687985"/>
                 </a:solidFill>
-                <a:latin typeface="Aptos"/>
+                <a:latin typeface="Arial"/>
               </a:rPr>
               <a:t>Tejaswi.Goel@Dell.com</a:t>
             </a:r>
@@ -3356,7 +3348,7 @@
                 <a:solidFill>
                   <a:srgbClr val="34383D"/>
                 </a:solidFill>
-                <a:latin typeface="Aptos"/>
+                <a:latin typeface="Arial"/>
               </a:rPr>
               <a:t>Sucheta Mahara</a:t>
             </a:r>
@@ -3369,7 +3361,7 @@
                 <a:solidFill>
                   <a:srgbClr val="687985"/>
                 </a:solidFill>
-                <a:latin typeface="Aptos"/>
+                <a:latin typeface="Arial"/>
               </a:rPr>
               <a:t>Sucheta.Mahara@dell.com</a:t>
             </a:r>
@@ -3457,7 +3449,7 @@
                 <a:solidFill>
                   <a:srgbClr val="00B8D7"/>
                 </a:solidFill>
-                <a:latin typeface="Aptos"/>
+                <a:latin typeface="Arial"/>
               </a:rPr>
               <a:t>PRIOR WORK + HACKATHON CONTRIBUTION</a:t>
             </a:r>
@@ -3494,7 +3486,7 @@
                 <a:solidFill>
                   <a:srgbClr val="FFFFFF"/>
                 </a:solidFill>
-                <a:latin typeface="Aptos"/>
+                <a:latin typeface="Arial"/>
               </a:rPr>
               <a:t>Existing SONiC controls. New persona workflow.</a:t>
             </a:r>
@@ -3531,7 +3523,7 @@
                 <a:solidFill>
                   <a:srgbClr val="FFFFFF"/>
                 </a:solidFill>
-                <a:latin typeface="Aptos"/>
+                <a:latin typeface="Arial"/>
               </a:rPr>
               <a:t>02</a:t>
             </a:r>
@@ -3572,7 +3564,7 @@
                 <a:solidFill>
                   <a:srgbClr val="687985"/>
                 </a:solidFill>
-                <a:latin typeface="Aptos"/>
+                <a:latin typeface="Arial"/>
               </a:rPr>
               <a:t>BEFORE THE HACKATHON</a:t>
             </a:r>
@@ -3585,7 +3577,7 @@
                 <a:solidFill>
                   <a:srgbClr val="34383D"/>
                 </a:solidFill>
-                <a:latin typeface="Aptos"/>
+                <a:latin typeface="Arial"/>
               </a:rPr>
               <a:t>Existing SONiC foundations</a:t>
             </a:r>
@@ -3598,7 +3590,7 @@
                 <a:solidFill>
                   <a:srgbClr val="34383D"/>
                 </a:solidFill>
-                <a:latin typeface="Aptos"/>
+                <a:latin typeface="Arial"/>
               </a:rPr>
               <a:t>FEATURE: service lifecycle</a:t>
             </a:r>
@@ -3611,7 +3603,7 @@
                 <a:solidFill>
                   <a:srgbClr val="34383D"/>
                 </a:solidFill>
-                <a:latin typeface="Aptos"/>
+                <a:latin typeface="Arial"/>
               </a:rPr>
               <a:t>Make / INCLUDE_*: image selection</a:t>
             </a:r>
@@ -3624,7 +3616,7 @@
                 <a:solidFill>
                   <a:srgbClr val="34383D"/>
                 </a:solidFill>
-                <a:latin typeface="Aptos"/>
+                <a:latin typeface="Arial"/>
               </a:rPr>
               <a:t>ConfigDB + config save: persistence</a:t>
             </a:r>
@@ -3637,7 +3629,7 @@
                 <a:solidFill>
                   <a:srgbClr val="34383D"/>
                 </a:solidFill>
-                <a:latin typeface="Aptos"/>
+                <a:latin typeface="Arial"/>
               </a:rPr>
               <a:t>FRR startup + supervisor: daemons</a:t>
             </a:r>
@@ -3678,7 +3670,7 @@
                 <a:solidFill>
                   <a:srgbClr val="009B77"/>
                 </a:solidFill>
-                <a:latin typeface="Aptos"/>
+                <a:latin typeface="Arial"/>
               </a:rPr>
               <a:t>BUILT DURING THE HACKATHON</a:t>
             </a:r>
@@ -3691,7 +3683,7 @@
                 <a:solidFill>
                   <a:srgbClr val="34383D"/>
                 </a:solidFill>
-                <a:latin typeface="Aptos"/>
+                <a:latin typeface="Arial"/>
               </a:rPr>
               <a:t>PersonaForge integration</a:t>
             </a:r>
@@ -3704,7 +3696,7 @@
                 <a:solidFill>
                   <a:srgbClr val="34383D"/>
                 </a:solidFill>
-                <a:latin typeface="Aptos"/>
+                <a:latin typeface="Arial"/>
               </a:rPr>
               <a:t>Reusable schema for YAML personas</a:t>
             </a:r>
@@ -3717,7 +3709,7 @@
                 <a:solidFill>
                   <a:srgbClr val="009B77"/>
                 </a:solidFill>
-                <a:latin typeface="Aptos"/>
+                <a:latin typeface="Arial"/>
               </a:rPr>
               <a:t>PERSONAFORGE_PROFILE build option</a:t>
             </a:r>
@@ -3730,7 +3722,7 @@
                 <a:solidFill>
                   <a:srgbClr val="34383D"/>
                 </a:solidFill>
-                <a:latin typeface="Aptos"/>
+                <a:latin typeface="Arial"/>
               </a:rPr>
               <a:t>Native plan / apply / status / drift</a:t>
             </a:r>
@@ -3743,7 +3735,7 @@
                 <a:solidFill>
                   <a:srgbClr val="34383D"/>
                 </a:solidFill>
-                <a:latin typeface="Aptos"/>
+                <a:latin typeface="Arial"/>
               </a:rPr>
               <a:t>Persistent FEATURE + FRR daemon policy</a:t>
             </a:r>
@@ -3756,7 +3748,7 @@
                 <a:solidFill>
                   <a:srgbClr val="34383D"/>
                 </a:solidFill>
-                <a:latin typeface="Aptos"/>
+                <a:latin typeface="Arial"/>
               </a:rPr>
               <a:t>Automated tests + three-DUT evidence</a:t>
             </a:r>
@@ -3795,7 +3787,7 @@
                 <a:solidFill>
                   <a:srgbClr val="08172F"/>
                 </a:solidFill>
-                <a:latin typeface="Aptos"/>
+                <a:latin typeface="Arial"/>
               </a:rPr>
               <a:t>Our contribution: one reusable role across build and runtime.</a:t>
             </a:r>
@@ -3883,7 +3875,7 @@
                 <a:solidFill>
                   <a:srgbClr val="00B8D7"/>
                 </a:solidFill>
-                <a:latin typeface="Aptos"/>
+                <a:latin typeface="Arial"/>
               </a:rPr>
               <a:t>THE JUDGE'S QUESTION</a:t>
             </a:r>
@@ -3920,7 +3912,7 @@
                 <a:solidFill>
                   <a:srgbClr val="FFFFFF"/>
                 </a:solidFill>
-                <a:latin typeface="Aptos"/>
+                <a:latin typeface="Arial"/>
               </a:rPr>
               <a:t>If FEATURE can stop it, why PersonaForge?</a:t>
             </a:r>
@@ -3957,7 +3949,7 @@
                 <a:solidFill>
                   <a:srgbClr val="FFFFFF"/>
                 </a:solidFill>
-                <a:latin typeface="Aptos"/>
+                <a:latin typeface="Arial"/>
               </a:rPr>
               <a:t>03</a:t>
             </a:r>
@@ -3998,7 +3990,7 @@
                 <a:solidFill>
                   <a:srgbClr val="687985"/>
                 </a:solidFill>
-                <a:latin typeface="Aptos"/>
+                <a:latin typeface="Arial"/>
               </a:rPr>
               <a:t>FULL IMAGE</a:t>
             </a:r>
@@ -4011,7 +4003,7 @@
                 <a:solidFill>
                   <a:srgbClr val="34383D"/>
                 </a:solidFill>
-                <a:latin typeface="Aptos"/>
+                <a:latin typeface="Arial"/>
               </a:rPr>
               <a:t>13 running</a:t>
             </a:r>
@@ -4024,7 +4016,7 @@
                 <a:solidFill>
                   <a:srgbClr val="34383D"/>
                 </a:solidFill>
-                <a:latin typeface="Aptos"/>
+                <a:latin typeface="Arial"/>
               </a:rPr>
               <a:t>28 Docker repos</a:t>
             </a:r>
@@ -4037,7 +4029,7 @@
                 <a:solidFill>
                   <a:srgbClr val="687985"/>
                 </a:solidFill>
-                <a:latin typeface="Aptos"/>
+                <a:latin typeface="Arial"/>
               </a:rPr>
               <a:t>Broad capability ships</a:t>
             </a:r>
@@ -4050,7 +4042,7 @@
                 <a:solidFill>
                   <a:srgbClr val="687985"/>
                 </a:solidFill>
-                <a:latin typeface="Aptos"/>
+                <a:latin typeface="Arial"/>
               </a:rPr>
               <a:t>Optional services remain available</a:t>
             </a:r>
@@ -4091,7 +4083,7 @@
                 <a:solidFill>
                   <a:srgbClr val="00B8D7"/>
                 </a:solidFill>
-                <a:latin typeface="Aptos"/>
+                <a:latin typeface="Arial"/>
               </a:rPr>
               <a:t>FEATURE-DISABLED</a:t>
             </a:r>
@@ -4104,7 +4096,7 @@
                 <a:solidFill>
                   <a:srgbClr val="00B8D7"/>
                 </a:solidFill>
-                <a:latin typeface="Aptos"/>
+                <a:latin typeface="Arial"/>
               </a:rPr>
               <a:t>9 running</a:t>
             </a:r>
@@ -4117,7 +4109,7 @@
                 <a:solidFill>
                   <a:srgbClr val="34383D"/>
                 </a:solidFill>
-                <a:latin typeface="Aptos"/>
+                <a:latin typeface="Arial"/>
               </a:rPr>
               <a:t>28 Docker repos</a:t>
             </a:r>
@@ -4130,7 +4122,7 @@
                 <a:solidFill>
                   <a:srgbClr val="687985"/>
                 </a:solidFill>
-                <a:latin typeface="Aptos"/>
+                <a:latin typeface="Arial"/>
               </a:rPr>
               <a:t>Active footprint drops</a:t>
             </a:r>
@@ -4143,7 +4135,7 @@
                 <a:solidFill>
                   <a:srgbClr val="D44848"/>
                 </a:solidFill>
-                <a:latin typeface="Aptos"/>
+                <a:latin typeface="Arial"/>
               </a:rPr>
               <a:t>Installed payload does not</a:t>
             </a:r>
@@ -4184,7 +4176,7 @@
                 <a:solidFill>
                   <a:srgbClr val="009B77"/>
                 </a:solidFill>
-                <a:latin typeface="Aptos"/>
+                <a:latin typeface="Arial"/>
               </a:rPr>
               <a:t>BUILD PERSONA</a:t>
             </a:r>
@@ -4197,7 +4189,7 @@
                 <a:solidFill>
                   <a:srgbClr val="687985"/>
                 </a:solidFill>
-                <a:latin typeface="Aptos"/>
+                <a:latin typeface="Arial"/>
               </a:rPr>
               <a:t>Sample persona</a:t>
             </a:r>
@@ -4210,7 +4202,7 @@
                 <a:solidFill>
                   <a:srgbClr val="08172F"/>
                 </a:solidFill>
-                <a:latin typeface="Aptos"/>
+                <a:latin typeface="Arial"/>
               </a:rPr>
               <a:t>l3-bgp-leaf-no-lag</a:t>
             </a:r>
@@ -4223,7 +4215,7 @@
                 <a:solidFill>
                   <a:srgbClr val="009B77"/>
                 </a:solidFill>
-                <a:latin typeface="Aptos"/>
+                <a:latin typeface="Arial"/>
               </a:rPr>
               <a:t>9 running</a:t>
             </a:r>
@@ -4236,7 +4228,7 @@
                 <a:solidFill>
                   <a:srgbClr val="34383D"/>
                 </a:solidFill>
-                <a:latin typeface="Aptos"/>
+                <a:latin typeface="Arial"/>
               </a:rPr>
               <a:t>19 Docker repos</a:t>
             </a:r>
@@ -4249,7 +4241,7 @@
                 <a:solidFill>
                   <a:srgbClr val="687985"/>
                 </a:solidFill>
-                <a:latin typeface="Aptos"/>
+                <a:latin typeface="Arial"/>
               </a:rPr>
               <a:t>Retains BGP + core services</a:t>
             </a:r>
@@ -4262,7 +4254,7 @@
                 <a:solidFill>
                   <a:srgbClr val="009B77"/>
                 </a:solidFill>
-                <a:latin typeface="Aptos"/>
+                <a:latin typeface="Arial"/>
               </a:rPr>
               <a:t>9 repositories physically absent</a:t>
             </a:r>
@@ -4275,7 +4267,7 @@
                 <a:solidFill>
                   <a:srgbClr val="34383D"/>
                 </a:solidFill>
-                <a:latin typeface="Aptos"/>
+                <a:latin typeface="Arial"/>
               </a:rPr>
               <a:t>Less dormant software to secure</a:t>
             </a:r>
@@ -4288,7 +4280,7 @@
                 <a:solidFill>
                   <a:srgbClr val="687985"/>
                 </a:solidFill>
-                <a:latin typeface="Aptos"/>
+                <a:latin typeface="Arial"/>
               </a:rPr>
               <a:t>This sample omits service images:</a:t>
             </a:r>
@@ -4301,7 +4293,7 @@
                 <a:solidFill>
                   <a:srgbClr val="34383D"/>
                 </a:solidFill>
-                <a:latin typeface="Aptos"/>
+                <a:latin typeface="Arial"/>
               </a:rPr>
               <a:t>gNMI • LLDP • SNMP • TEAMD</a:t>
             </a:r>
@@ -4340,7 +4332,7 @@
                 <a:solidFill>
                   <a:srgbClr val="08172F"/>
                 </a:solidFill>
-                <a:latin typeface="Aptos"/>
+                <a:latin typeface="Arial"/>
               </a:rPr>
               <a:t>Runtime controls activity.  Build controls shipment.  One persona defines both.</a:t>
             </a:r>
@@ -4428,7 +4420,7 @@
                 <a:solidFill>
                   <a:srgbClr val="00B8D7"/>
                 </a:solidFill>
-                <a:latin typeface="Aptos"/>
+                <a:latin typeface="Arial"/>
               </a:rPr>
               <a:t>THE INNOVATION</a:t>
             </a:r>
@@ -4465,7 +4457,7 @@
                 <a:solidFill>
                   <a:srgbClr val="FFFFFF"/>
                 </a:solidFill>
-                <a:latin typeface="Aptos"/>
+                <a:latin typeface="Arial"/>
               </a:rPr>
               <a:t>One persona compiles into two operating models</a:t>
             </a:r>
@@ -4502,7 +4494,7 @@
                 <a:solidFill>
                   <a:srgbClr val="FFFFFF"/>
                 </a:solidFill>
-                <a:latin typeface="Aptos"/>
+                <a:latin typeface="Arial"/>
               </a:rPr>
               <a:t>04</a:t>
             </a:r>
@@ -4543,7 +4535,7 @@
                 <a:solidFill>
                   <a:srgbClr val="00B8D7"/>
                 </a:solidFill>
-                <a:latin typeface="Aptos"/>
+                <a:latin typeface="Arial"/>
               </a:rPr>
               <a:t>DECLARE ONCE</a:t>
             </a:r>
@@ -4556,7 +4548,7 @@
                 <a:solidFill>
                   <a:srgbClr val="34383D"/>
                 </a:solidFill>
-                <a:latin typeface="Aptos"/>
+                <a:latin typeface="Arial"/>
               </a:rPr>
               <a:t>Persona YAML</a:t>
             </a:r>
@@ -4569,7 +4561,7 @@
                 <a:solidFill>
                   <a:srgbClr val="687985"/>
                 </a:solidFill>
-                <a:latin typeface="Aptos"/>
+                <a:latin typeface="Arial"/>
               </a:rPr>
               <a:t>required / omit  •  feature state  •  FRR daemon policy  •  persistence intent</a:t>
             </a:r>
@@ -4606,7 +4598,7 @@
                 <a:solidFill>
                   <a:srgbClr val="009B77"/>
                 </a:solidFill>
-                <a:latin typeface="Aptos"/>
+                <a:latin typeface="Arial"/>
               </a:rPr>
               <a:t>↓</a:t>
             </a:r>
@@ -4643,7 +4635,7 @@
                 <a:solidFill>
                   <a:srgbClr val="198FD3"/>
                 </a:solidFill>
-                <a:latin typeface="Aptos"/>
+                <a:latin typeface="Arial"/>
               </a:rPr>
               <a:t>↓</a:t>
             </a:r>
@@ -4660,7 +4652,7 @@
         <p:spPr>
           <a:xfrm>
             <a:off x="603504" y="2834640"/>
-            <a:ext cx="5074920" cy="2450592"/>
+            <a:ext cx="5074920" cy="2651760"/>
           </a:xfrm>
           <a:prstGeom prst="roundRect">
             <a:avLst/>
@@ -4684,7 +4676,7 @@
                 <a:solidFill>
                   <a:srgbClr val="009B77"/>
                 </a:solidFill>
-                <a:latin typeface="Aptos"/>
+                <a:latin typeface="Arial"/>
               </a:rPr>
               <a:t>BUILD PATH • NEW PROFILE OPTION</a:t>
             </a:r>
@@ -4697,7 +4689,7 @@
                 <a:solidFill>
                   <a:srgbClr val="34383D"/>
                 </a:solidFill>
-                <a:latin typeface="Aptos"/>
+                <a:latin typeface="Arial"/>
               </a:rPr>
               <a:t>Normal SONiC Make</a:t>
             </a:r>
@@ -4710,7 +4702,7 @@
                 <a:solidFill>
                   <a:srgbClr val="009B77"/>
                 </a:solidFill>
-                <a:latin typeface="Aptos"/>
+                <a:latin typeface="Arial"/>
               </a:rPr>
               <a:t>make PERSONAFORGE_PROFILE=l3-bgp-leaf-no-lag \</a:t>
             </a:r>
@@ -4723,7 +4715,7 @@
                 <a:solidFill>
                   <a:srgbClr val="009B77"/>
                 </a:solidFill>
-                <a:latin typeface="Aptos"/>
+                <a:latin typeface="Arial"/>
               </a:rPr>
               <a:t>    target/sonic-broadcom.bin</a:t>
             </a:r>
@@ -4736,7 +4728,7 @@
                 <a:solidFill>
                   <a:srgbClr val="34383D"/>
                 </a:solidFill>
-                <a:latin typeface="Aptos"/>
+                <a:latin typeface="Arial"/>
               </a:rPr>
               <a:t>Profile selects composition; target stays standard</a:t>
             </a:r>
@@ -4749,7 +4741,7 @@
                 <a:solidFill>
                   <a:srgbClr val="687985"/>
                 </a:solidFill>
-                <a:latin typeface="Aptos"/>
+                <a:latin typeface="Arial"/>
               </a:rPr>
               <a:t>No profile selected: normal SONiC build</a:t>
             </a:r>
@@ -4766,7 +4758,7 @@
         <p:spPr>
           <a:xfrm>
             <a:off x="6190488" y="2834640"/>
-            <a:ext cx="5093208" cy="2450592"/>
+            <a:ext cx="5093208" cy="2651760"/>
           </a:xfrm>
           <a:prstGeom prst="roundRect">
             <a:avLst/>
@@ -4783,6 +4775,7 @@
         <p:txBody>
           <a:bodyPr wrap="square" lIns="0" rIns="0" tIns="0" bIns="0" anchor="t"/>
           <a:lstStyle/>
+          <a:p/>
         </p:txBody>
       </p:sp>
       <p:sp>
@@ -4814,7 +4807,7 @@
                 <a:solidFill>
                   <a:srgbClr val="198FD3"/>
                 </a:solidFill>
-                <a:latin typeface="Aptos"/>
+                <a:latin typeface="Arial"/>
               </a:rPr>
               <a:t>RUNTIME PATH • IMPLEMENTED</a:t>
             </a:r>
@@ -4851,7 +4844,7 @@
                 <a:solidFill>
                   <a:srgbClr val="34383D"/>
                 </a:solidFill>
-                <a:latin typeface="Aptos"/>
+                <a:latin typeface="Arial"/>
               </a:rPr>
               <a:t>Native SONiC CLI</a:t>
             </a:r>
@@ -4867,8 +4860,8 @@
         </p:nvSpPr>
         <p:spPr>
           <a:xfrm>
-            <a:off x="6437376" y="3703320"/>
-            <a:ext cx="4599432" cy="1143000"/>
+            <a:off x="6437376" y="3712463"/>
+            <a:ext cx="4599432" cy="1344168"/>
           </a:xfrm>
           <a:prstGeom prst="rect">
             <a:avLst/>
@@ -4888,76 +4881,76 @@
                 <a:solidFill>
                   <a:srgbClr val="687985"/>
                 </a:solidFill>
-                <a:latin typeface="Consolas"/>
-              </a:rPr>
-              <a:t>PF_PROFILE=l3-bgp-leaf-no-lag</a:t>
+                <a:latin typeface="Arial"/>
+              </a:rPr>
+              <a:t>COMMAND OVERVIEW</a:t>
             </a:r>
             <a:endParaRPr lang="en-US" sz="1000"/>
           </a:p>
           <a:p>
             <a:pPr algn="l"/>
             <a:r>
-              <a:rPr lang="en-US" sz="1100" dirty="0">
+              <a:rPr lang="en-US" sz="1400" dirty="0">
                 <a:solidFill>
                   <a:srgbClr val="08172F"/>
                 </a:solidFill>
-                <a:latin typeface="Consolas"/>
-              </a:rPr>
-              <a:t>show personaforge plan "$PF_PROFILE"</a:t>
-            </a:r>
-            <a:endParaRPr lang="en-US" sz="1100"/>
-          </a:p>
-          <a:p>
-            <a:pPr algn="l"/>
-            <a:r>
-              <a:rPr lang="en-US" sz="1100" dirty="0" b="1">
+                <a:latin typeface="Arial"/>
+              </a:rPr>
+              <a:t>show personaforge plan &lt;profile&gt;</a:t>
+            </a:r>
+            <a:endParaRPr lang="en-US" sz="1400"/>
+          </a:p>
+          <a:p>
+            <a:pPr algn="l"/>
+            <a:r>
+              <a:rPr lang="en-US" sz="1400" dirty="0" b="1">
                 <a:solidFill>
                   <a:srgbClr val="198FD3"/>
                 </a:solidFill>
-                <a:latin typeface="Consolas"/>
-              </a:rPr>
-              <a:t>sudo config personaforge apply "$PF_PROFILE" \</a:t>
-            </a:r>
-            <a:endParaRPr lang="en-US" sz="1100"/>
-          </a:p>
-          <a:p>
-            <a:pPr algn="l"/>
-            <a:r>
-              <a:rPr lang="en-US" sz="1100" dirty="0">
+                <a:latin typeface="Arial"/>
+              </a:rPr>
+              <a:t>config personaforge apply &lt;profile&gt;</a:t>
+            </a:r>
+            <a:endParaRPr lang="en-US" sz="1400"/>
+          </a:p>
+          <a:p>
+            <a:pPr algn="l"/>
+            <a:r>
+              <a:rPr lang="en-US" sz="1400" dirty="0">
+                <a:solidFill>
+                  <a:srgbClr val="08172F"/>
+                </a:solidFill>
+                <a:latin typeface="Arial"/>
+              </a:rPr>
+              <a:t>show personaforge status</a:t>
+            </a:r>
+            <a:endParaRPr lang="en-US" sz="1400"/>
+          </a:p>
+          <a:p>
+            <a:pPr algn="l"/>
+            <a:r>
+              <a:rPr lang="en-US" sz="1400" dirty="0">
+                <a:solidFill>
+                  <a:srgbClr val="08172F"/>
+                </a:solidFill>
+                <a:latin typeface="Arial"/>
+              </a:rPr>
+              <a:t>show personaforge drift</a:t>
+            </a:r>
+            <a:endParaRPr lang="en-US" sz="1400"/>
+          </a:p>
+          <a:p>
+            <a:pPr algn="l"/>
+            <a:r>
+              <a:rPr lang="en-US" sz="1400" dirty="0" b="1">
                 <a:solidFill>
                   <a:srgbClr val="198FD3"/>
                 </a:solidFill>
-                <a:latin typeface="Consolas"/>
-              </a:rPr>
-              <a:t>  --persist --allow-disruptive -y</a:t>
-            </a:r>
-            <a:endParaRPr lang="en-US" sz="1100"/>
-          </a:p>
-          <a:p>
-            <a:pPr algn="l"/>
-            <a:r>
-              <a:rPr lang="en-US" sz="1100" dirty="0">
-                <a:solidFill>
-                  <a:srgbClr val="08172F"/>
-                </a:solidFill>
-                <a:latin typeface="Consolas"/>
-              </a:rPr>
-              <a:t>show personaforge status --detail</a:t>
-            </a:r>
-            <a:endParaRPr lang="en-US" sz="1100"/>
-          </a:p>
-          <a:p>
-            <a:pPr algn="l"/>
-            <a:r>
-              <a:rPr lang="en-US" sz="1100" dirty="0">
-                <a:solidFill>
-                  <a:srgbClr val="08172F"/>
-                </a:solidFill>
-                <a:latin typeface="Consolas"/>
-              </a:rPr>
-              <a:t>show personaforge drift</a:t>
-            </a:r>
-            <a:endParaRPr lang="en-US" sz="1100"/>
+                <a:latin typeface="Arial"/>
+              </a:rPr>
+              <a:t>config personaforge deactivate</a:t>
+            </a:r>
+            <a:endParaRPr lang="en-US" sz="1400"/>
           </a:p>
         </p:txBody>
       </p:sp>
@@ -4969,8 +4962,8 @@
         </p:nvSpPr>
         <p:spPr>
           <a:xfrm>
-            <a:off x="6437376" y="4983480"/>
-            <a:ext cx="4590288" cy="210312"/>
+            <a:off x="6437376" y="5175504"/>
+            <a:ext cx="4590288" cy="228600"/>
           </a:xfrm>
           <a:prstGeom prst="rect">
             <a:avLst/>
@@ -4990,9 +4983,9 @@
                 <a:solidFill>
                   <a:srgbClr val="009B77"/>
                 </a:solidFill>
-                <a:latin typeface="Aptos"/>
-              </a:rPr>
-              <a:t>Persists across node + container restarts</a:t>
+                <a:latin typeface="Arial"/>
+              </a:rPr>
+              <a:t>Apply a role. Restore captured settings.</a:t>
             </a:r>
             <a:endParaRPr lang="en-US" sz="1200"/>
           </a:p>
@@ -5006,7 +4999,7 @@
         </p:nvSpPr>
         <p:spPr>
           <a:xfrm>
-            <a:off x="603504" y="5477256"/>
+            <a:off x="603504" y="5623560"/>
             <a:ext cx="10680192" cy="713232"/>
           </a:xfrm>
           <a:prstGeom prst="roundRect">
@@ -5029,7 +5022,7 @@
                 <a:solidFill>
                   <a:srgbClr val="08172F"/>
                 </a:solidFill>
-                <a:latin typeface="Aptos"/>
+                <a:latin typeface="Arial"/>
               </a:rPr>
               <a:t>Safety: schema + conflict checks • protected core • explicit disruption authorization</a:t>
             </a:r>
@@ -5042,7 +5035,7 @@
                 <a:solidFill>
                   <a:srgbClr val="198FD3"/>
                 </a:solidFill>
-                <a:latin typeface="Aptos"/>
+                <a:latin typeface="Arial"/>
               </a:rPr>
               <a:t>Add personas through YAML • reusable, platform-independent contract</a:t>
             </a:r>
@@ -5130,7 +5123,7 @@
                 <a:solidFill>
                   <a:srgbClr val="00B8D7"/>
                 </a:solidFill>
-                <a:latin typeface="Aptos"/>
+                <a:latin typeface="Arial"/>
               </a:rPr>
               <a:t>MEASURED FOOTPRINT + SECURITY VALUE</a:t>
             </a:r>
@@ -5167,7 +5160,7 @@
                 <a:solidFill>
                   <a:srgbClr val="FFFFFF"/>
                 </a:solidFill>
-                <a:latin typeface="Aptos"/>
+                <a:latin typeface="Arial"/>
               </a:rPr>
               <a:t>Smaller footprint. Less software exposure.</a:t>
             </a:r>
@@ -5204,7 +5197,7 @@
                 <a:solidFill>
                   <a:srgbClr val="FFFFFF"/>
                 </a:solidFill>
-                <a:latin typeface="Aptos"/>
+                <a:latin typeface="Arial"/>
               </a:rPr>
               <a:t>05</a:t>
             </a:r>
@@ -5245,7 +5238,7 @@
                 <a:solidFill>
                   <a:srgbClr val="009B77"/>
                 </a:solidFill>
-                <a:latin typeface="Aptos"/>
+                <a:latin typeface="Arial"/>
               </a:rPr>
               <a:t>7.1%</a:t>
             </a:r>
@@ -5258,7 +5251,7 @@
                 <a:solidFill>
                   <a:srgbClr val="34383D"/>
                 </a:solidFill>
-                <a:latin typeface="Aptos"/>
+                <a:latin typeface="Arial"/>
               </a:rPr>
               <a:t>smaller installer</a:t>
             </a:r>
@@ -5271,7 +5264,7 @@
                 <a:solidFill>
                   <a:srgbClr val="687985"/>
                 </a:solidFill>
-                <a:latin typeface="Aptos"/>
+                <a:latin typeface="Arial"/>
               </a:rPr>
               <a:t>80.9 MB removed</a:t>
             </a:r>
@@ -5312,7 +5305,7 @@
                 <a:solidFill>
                   <a:srgbClr val="009B77"/>
                 </a:solidFill>
-                <a:latin typeface="Aptos"/>
+                <a:latin typeface="Arial"/>
               </a:rPr>
               <a:t>10.0%</a:t>
             </a:r>
@@ -5325,7 +5318,7 @@
                 <a:solidFill>
                   <a:srgbClr val="34383D"/>
                 </a:solidFill>
-                <a:latin typeface="Aptos"/>
+                <a:latin typeface="Arial"/>
               </a:rPr>
               <a:t>smaller installed</a:t>
             </a:r>
@@ -5338,7 +5331,7 @@
                 <a:solidFill>
                   <a:srgbClr val="687985"/>
                 </a:solidFill>
-                <a:latin typeface="Aptos"/>
+                <a:latin typeface="Arial"/>
               </a:rPr>
               <a:t>283.3 MB removed</a:t>
             </a:r>
@@ -5379,7 +5372,7 @@
                 <a:solidFill>
                   <a:srgbClr val="009B77"/>
                 </a:solidFill>
-                <a:latin typeface="Aptos"/>
+                <a:latin typeface="Arial"/>
               </a:rPr>
               <a:t>32.1%</a:t>
             </a:r>
@@ -5392,7 +5385,7 @@
                 <a:solidFill>
                   <a:srgbClr val="34383D"/>
                 </a:solidFill>
-                <a:latin typeface="Aptos"/>
+                <a:latin typeface="Arial"/>
               </a:rPr>
               <a:t>fewer Docker repos</a:t>
             </a:r>
@@ -5405,7 +5398,7 @@
                 <a:solidFill>
                   <a:srgbClr val="687985"/>
                 </a:solidFill>
-                <a:latin typeface="Aptos"/>
+                <a:latin typeface="Arial"/>
               </a:rPr>
               <a:t>28 → 19</a:t>
             </a:r>
@@ -5446,7 +5439,7 @@
                 <a:solidFill>
                   <a:srgbClr val="009B77"/>
                 </a:solidFill>
-                <a:latin typeface="Aptos"/>
+                <a:latin typeface="Arial"/>
               </a:rPr>
               <a:t>17.6%</a:t>
             </a:r>
@@ -5459,7 +5452,7 @@
                 <a:solidFill>
                   <a:srgbClr val="34383D"/>
                 </a:solidFill>
-                <a:latin typeface="Aptos"/>
+                <a:latin typeface="Arial"/>
               </a:rPr>
               <a:t>fewer Docker files</a:t>
             </a:r>
@@ -5472,7 +5465,7 @@
                 <a:solidFill>
                   <a:srgbClr val="687985"/>
                 </a:solidFill>
-                <a:latin typeface="Aptos"/>
+                <a:latin typeface="Arial"/>
               </a:rPr>
               <a:t>29,579 → 24,361</a:t>
             </a:r>
@@ -5511,7 +5504,7 @@
                 <a:solidFill>
                   <a:srgbClr val="009B77"/>
                 </a:solidFill>
-                <a:latin typeface="Aptos"/>
+                <a:latin typeface="Arial"/>
               </a:rPr>
               <a:t>SECURITY THROUGH LEAST FUNCTIONALITY</a:t>
             </a:r>
@@ -5524,7 +5517,7 @@
                 <a:solidFill>
                   <a:srgbClr val="34383D"/>
                 </a:solidFill>
-                <a:latin typeface="Aptos"/>
+                <a:latin typeface="Arial"/>
               </a:rPr>
               <a:t>Fewer components. Less potential exposure.</a:t>
             </a:r>
@@ -5537,7 +5530,7 @@
                 <a:solidFill>
                   <a:srgbClr val="009B77"/>
                 </a:solidFill>
-                <a:latin typeface="Aptos"/>
+                <a:latin typeface="Arial"/>
               </a:rPr>
               <a:t>9 repositories absent: less software to scan and maintain</a:t>
             </a:r>
@@ -5550,7 +5543,7 @@
                 <a:solidFill>
                   <a:srgbClr val="687985"/>
                 </a:solidFill>
-                <a:latin typeface="Aptos"/>
+                <a:latin typeface="Arial"/>
               </a:rPr>
               <a:t>Omitted containers require reinstallation to run</a:t>
             </a:r>
@@ -5563,7 +5556,7 @@
                 <a:solidFill>
                   <a:srgbClr val="687985"/>
                 </a:solidFill>
-                <a:latin typeface="Aptos"/>
+                <a:latin typeface="Arial"/>
               </a:rPr>
               <a:t>Repository reduction measured; CVE reduction not yet measured</a:t>
             </a:r>
@@ -5604,7 +5597,7 @@
                 <a:solidFill>
                   <a:srgbClr val="FFFFFF"/>
                 </a:solidFill>
-                <a:latin typeface="Aptos"/>
+                <a:latin typeface="Arial"/>
               </a:rPr>
               <a:t/>
             </a:r>
@@ -5641,7 +5634,7 @@
                 <a:solidFill>
                   <a:srgbClr val="00B8D7"/>
                 </a:solidFill>
-                <a:latin typeface="Aptos"/>
+                <a:latin typeface="Arial"/>
               </a:rPr>
               <a:t>RUNNING vs INSTALLED</a:t>
             </a:r>
@@ -5678,7 +5671,7 @@
                 <a:solidFill>
                   <a:srgbClr val="687985"/>
                 </a:solidFill>
-                <a:latin typeface="Aptos"/>
+                <a:latin typeface="Arial"/>
               </a:rPr>
               <a:t>FULL</a:t>
             </a:r>
@@ -5715,7 +5708,7 @@
                 <a:solidFill>
                   <a:srgbClr val="198FD3"/>
                 </a:solidFill>
-                <a:latin typeface="Aptos"/>
+                <a:latin typeface="Arial"/>
               </a:rPr>
               <a:t>FEATURE</a:t>
             </a:r>
@@ -5728,7 +5721,7 @@
                 <a:solidFill>
                   <a:srgbClr val="198FD3"/>
                 </a:solidFill>
-                <a:latin typeface="Aptos"/>
+                <a:latin typeface="Arial"/>
               </a:rPr>
               <a:t>DISABLED</a:t>
             </a:r>
@@ -5765,7 +5758,7 @@
                 <a:solidFill>
                   <a:srgbClr val="009B77"/>
                 </a:solidFill>
-                <a:latin typeface="Aptos"/>
+                <a:latin typeface="Arial"/>
               </a:rPr>
               <a:t>BUILD</a:t>
             </a:r>
@@ -5802,7 +5795,7 @@
                 <a:solidFill>
                   <a:srgbClr val="34383D"/>
                 </a:solidFill>
-                <a:latin typeface="Aptos"/>
+                <a:latin typeface="Arial"/>
               </a:rPr>
               <a:t>Running</a:t>
             </a:r>
@@ -5815,7 +5808,7 @@
                 <a:solidFill>
                   <a:srgbClr val="687985"/>
                 </a:solidFill>
-                <a:latin typeface="Aptos"/>
+                <a:latin typeface="Arial"/>
               </a:rPr>
               <a:t>containers</a:t>
             </a:r>
@@ -5852,7 +5845,7 @@
                 <a:solidFill>
                   <a:srgbClr val="34383D"/>
                 </a:solidFill>
-                <a:latin typeface="Aptos"/>
+                <a:latin typeface="Arial"/>
               </a:rPr>
               <a:t>Installed</a:t>
             </a:r>
@@ -5865,7 +5858,7 @@
                 <a:solidFill>
                   <a:srgbClr val="687985"/>
                 </a:solidFill>
-                <a:latin typeface="Aptos"/>
+                <a:latin typeface="Arial"/>
               </a:rPr>
               <a:t>Docker repos</a:t>
             </a:r>
@@ -5902,7 +5895,7 @@
                 <a:solidFill>
                   <a:srgbClr val="34383D"/>
                 </a:solidFill>
-                <a:latin typeface="Aptos"/>
+                <a:latin typeface="Arial"/>
               </a:rPr>
               <a:t>13</a:t>
             </a:r>
@@ -5939,7 +5932,7 @@
                 <a:solidFill>
                   <a:srgbClr val="198FD3"/>
                 </a:solidFill>
-                <a:latin typeface="Aptos"/>
+                <a:latin typeface="Arial"/>
               </a:rPr>
               <a:t>9</a:t>
             </a:r>
@@ -5976,7 +5969,7 @@
                 <a:solidFill>
                   <a:srgbClr val="009B77"/>
                 </a:solidFill>
-                <a:latin typeface="Aptos"/>
+                <a:latin typeface="Arial"/>
               </a:rPr>
               <a:t>9</a:t>
             </a:r>
@@ -6013,7 +6006,7 @@
                 <a:solidFill>
                   <a:srgbClr val="34383D"/>
                 </a:solidFill>
-                <a:latin typeface="Aptos"/>
+                <a:latin typeface="Arial"/>
               </a:rPr>
               <a:t>28</a:t>
             </a:r>
@@ -6050,7 +6043,7 @@
                 <a:solidFill>
                   <a:srgbClr val="198FD3"/>
                 </a:solidFill>
-                <a:latin typeface="Aptos"/>
+                <a:latin typeface="Arial"/>
               </a:rPr>
               <a:t>28</a:t>
             </a:r>
@@ -6087,7 +6080,7 @@
                 <a:solidFill>
                   <a:srgbClr val="009B77"/>
                 </a:solidFill>
-                <a:latin typeface="Aptos"/>
+                <a:latin typeface="Arial"/>
               </a:rPr>
               <a:t>19</a:t>
             </a:r>
@@ -6126,7 +6119,7 @@
                 <a:solidFill>
                   <a:srgbClr val="08172F"/>
                 </a:solidFill>
-                <a:latin typeface="Aptos"/>
+                <a:latin typeface="Arial"/>
               </a:rPr>
               <a:t>13 → 9: FOUR SERVICES</a:t>
             </a:r>
@@ -6139,7 +6132,7 @@
                 <a:solidFill>
                   <a:srgbClr val="198FD3"/>
                 </a:solidFill>
-                <a:latin typeface="Aptos"/>
+                <a:latin typeface="Arial"/>
               </a:rPr>
               <a:t>gnmi • lldp • snmp • teamd</a:t>
             </a:r>
@@ -6176,7 +6169,7 @@
                 <a:solidFill>
                   <a:srgbClr val="198FD3"/>
                 </a:solidFill>
-                <a:latin typeface="Aptos"/>
+                <a:latin typeface="Arial"/>
               </a:rPr>
               <a:t>FEATURE: services stopped</a:t>
             </a:r>
@@ -6189,7 +6182,7 @@
                 <a:solidFill>
                   <a:srgbClr val="009B77"/>
                 </a:solidFill>
-                <a:latin typeface="Aptos"/>
+                <a:latin typeface="Arial"/>
               </a:rPr>
               <a:t>BUILD: their images + 5 dormant repos omitted</a:t>
             </a:r>
@@ -6228,7 +6221,7 @@
                 <a:solidFill>
                   <a:srgbClr val="08172F"/>
                 </a:solidFill>
-                <a:latin typeface="Aptos"/>
+                <a:latin typeface="Arial"/>
               </a:rPr>
               <a:t>SCALE PRESERVED  •  64 VRFs  •  4,096 routes  •  completion spread &lt;1%</a:t>
             </a:r>
@@ -6241,7 +6234,7 @@
                 <a:solidFill>
                   <a:srgbClr val="687985"/>
                 </a:solidFill>
-                <a:latin typeface="Aptos"/>
+                <a:latin typeface="Arial"/>
               </a:rPr>
               <a:t>Broadcom three-DUT study • all healthy after cleanup</a:t>
             </a:r>
@@ -6254,7 +6247,7 @@
                 <a:solidFill>
                   <a:srgbClr val="687985"/>
                 </a:solidFill>
-                <a:latin typeface="Aptos"/>
+                <a:latin typeface="Arial"/>
               </a:rPr>
               <a:t>Separate BFDD lifecycle validation • 50 automated product tests</a:t>
             </a:r>
@@ -6342,9 +6335,9 @@
                 <a:solidFill>
                   <a:srgbClr val="00B8D7"/>
                 </a:solidFill>
-                <a:latin typeface="Aptos"/>
-              </a:rPr>
-              <a:t>RECORDED DEMO</a:t>
+                <a:latin typeface="Arial"/>
+              </a:rPr>
+              <a:t>CLICK VIDEO TO PLAY  •  BUILD + RUNTIME  •  1:46</a:t>
             </a:r>
             <a:endParaRPr lang="en-US" sz="900"/>
           </a:p>
@@ -6379,7 +6372,7 @@
                 <a:solidFill>
                   <a:srgbClr val="FFFFFF"/>
                 </a:solidFill>
-                <a:latin typeface="Aptos"/>
+                <a:latin typeface="Arial"/>
               </a:rPr>
               <a:t>PersonaForge in action</a:t>
             </a:r>
@@ -6416,7 +6409,7 @@
                 <a:solidFill>
                   <a:srgbClr val="FFFFFF"/>
                 </a:solidFill>
-                <a:latin typeface="Aptos"/>
+                <a:latin typeface="Arial"/>
               </a:rPr>
               <a:t>06</a:t>
             </a:r>
@@ -6424,78 +6417,66 @@
           </a:p>
         </p:txBody>
       </p:sp>
-      <p:sp>
-        <p:nvSpPr>
-          <p:cNvPr id="10" name="Text 10"/>
-          <p:cNvSpPr txBox="1"/>
-          <p:nvPr/>
-        </p:nvSpPr>
-        <p:spPr>
-          <a:xfrm>
-            <a:off x="1709928" y="1344168"/>
-            <a:ext cx="8778240" cy="4937760"/>
-          </a:xfrm>
-          <a:prstGeom prst="rect">
-            <a:avLst/>
-          </a:prstGeom>
-          <a:solidFill>
-            <a:srgbClr val="091A28"/>
-          </a:solidFill>
-          <a:ln w="12700">
-            <a:solidFill>
-              <a:srgbClr val="00B8D7"/>
-            </a:solidFill>
-          </a:ln>
-        </p:spPr>
-        <p:txBody>
-          <a:bodyPr wrap="square" lIns="182880" rIns="182880" tIns="182880" bIns="182880" anchor="ctr"/>
-          <a:lstStyle/>
-          <a:p>
-            <a:pPr algn="ctr"/>
-            <a:r>
-              <a:rPr lang="en-US" sz="2800" dirty="0" b="1">
-                <a:solidFill>
-                  <a:srgbClr val="FFFFFF"/>
-                </a:solidFill>
-                <a:latin typeface="Aptos"/>
-              </a:rPr>
-              <a:t>Demo video</a:t>
-            </a:r>
-            <a:endParaRPr lang="en-US" sz="2800"/>
-          </a:p>
-          <a:p>
-            <a:pPr algn="ctr"/>
-            <a:r>
-              <a:rPr lang="en-US" sz="1600" dirty="0" b="1">
-                <a:solidFill>
-                  <a:srgbClr val="00B8D7"/>
-                </a:solidFill>
-                <a:latin typeface="Aptos"/>
-              </a:rPr>
-              <a:t>2 minutes 30 seconds</a:t>
-            </a:r>
-            <a:endParaRPr lang="en-US" sz="1600"/>
-          </a:p>
-          <a:p>
-            <a:pPr algn="ctr"/>
-            <a:r>
-              <a:rPr lang="en-US" sz="1100" dirty="0">
-                <a:solidFill>
-                  <a:srgbClr val="A8BBC7"/>
-                </a:solidFill>
-                <a:latin typeface="Aptos"/>
-              </a:rPr>
-              <a:t>Recording to be inserted</a:t>
-            </a:r>
-            <a:endParaRPr lang="en-US" sz="1100"/>
-          </a:p>
-        </p:txBody>
-      </p:sp>
+      <p:pic>
+        <p:nvPicPr>
+          <p:cNvPr id="100" name="PersonaForge Build + Runtime Demo — 1:46 — Click to play" descr="Silent 1 minute 46 second demo: build persona, then runtime persona.">
+            <a:hlinkClick r:id="" action="ppaction://media"/>
+          </p:cNvPr>
+          <p:cNvPicPr>
+            <a:picLocks noChangeAspect="1"/>
+          </p:cNvPicPr>
+          <p:nvPr>
+            <a:videoFile r:link="rId4"/>
+            <p:extLst>
+              <p:ext uri="{DAA4B4D4-6D71-4841-9C94-3DE7FCFB9230}">
+                <p14:media xmlns:p14="http://schemas.microsoft.com/office/powerpoint/2010/main" r:embed="rId3"/>
+              </p:ext>
+            </p:extLst>
+          </p:nvPr>
+        </p:nvPicPr>
+        <p:blipFill>
+          <a:blip r:embed="rId5"/>
+          <a:stretch>
+            <a:fillRect/>
+          </a:stretch>
+        </p:blipFill>
+        <p:spPr>
+          <a:xfrm>
+            <a:off x="975360" y="1005840"/>
+            <a:ext cx="10241280" cy="5760720"/>
+          </a:xfrm>
+          <a:prstGeom prst="rect">
+            <a:avLst/>
+          </a:prstGeom>
+        </p:spPr>
+      </p:pic>
     </p:spTree>
   </p:cSld>
   <p:clrMapOvr>
     <a:masterClrMapping/>
   </p:clrMapOvr>
+  <p:timing>
+    <p:tnLst>
+      <p:par>
+        <p:cTn id="1" dur="indefinite" restart="never" nodeType="tmRoot">
+          <p:childTnLst>
+            <p:video>
+              <p:cMediaNode vol="80000">
+                <p:cTn id="2" fill="hold" display="0">
+                  <p:stCondLst>
+                    <p:cond delay="indefinite"/>
+                  </p:stCondLst>
+                </p:cTn>
+                <p:tgtEl>
+                  <p:spTgt spid="100"/>
+                </p:tgtEl>
+              </p:cMediaNode>
+            </p:video>
+          </p:childTnLst>
+        </p:cTn>
+      </p:par>
+    </p:tnLst>
+  </p:timing>
 </p:sld>
 </file>
 
@@ -6571,7 +6552,7 @@
                 <a:solidFill>
                   <a:srgbClr val="00B8D7"/>
                 </a:solidFill>
-                <a:latin typeface="Aptos"/>
+                <a:latin typeface="Arial"/>
               </a:rPr>
               <a:t>SOURCE + HACKATHON STATUS</a:t>
             </a:r>
@@ -6608,7 +6589,7 @@
                 <a:solidFill>
                   <a:srgbClr val="FFFFFF"/>
                 </a:solidFill>
-                <a:latin typeface="Aptos"/>
+                <a:latin typeface="Arial"/>
               </a:rPr>
               <a:t>Hackathon scope delivered. Real-device results.</a:t>
             </a:r>
@@ -6645,7 +6626,7 @@
                 <a:solidFill>
                   <a:srgbClr val="FFFFFF"/>
                 </a:solidFill>
-                <a:latin typeface="Aptos"/>
+                <a:latin typeface="Arial"/>
               </a:rPr>
               <a:t>07</a:t>
             </a:r>
@@ -6682,7 +6663,7 @@
                 <a:solidFill>
                   <a:srgbClr val="08172F"/>
                 </a:solidFill>
-                <a:latin typeface="Aptos"/>
+                <a:latin typeface="Arial"/>
               </a:rPr>
               <a:t>One persona. Build lean. Adapt at runtime.</a:t>
             </a:r>
@@ -6723,7 +6704,7 @@
                 <a:solidFill>
                   <a:srgbClr val="009B77"/>
                 </a:solidFill>
-                <a:latin typeface="Aptos"/>
+                <a:latin typeface="Arial"/>
               </a:rPr>
               <a:t>COMPLETED — HACKATHON</a:t>
             </a:r>
@@ -6736,7 +6717,7 @@
                 <a:solidFill>
                   <a:srgbClr val="34383D"/>
                 </a:solidFill>
-                <a:latin typeface="Aptos"/>
+                <a:latin typeface="Arial"/>
               </a:rPr>
               <a:t>Build + runtime personas</a:t>
             </a:r>
@@ -6749,7 +6730,7 @@
                 <a:solidFill>
                   <a:srgbClr val="34383D"/>
                 </a:solidFill>
-                <a:latin typeface="Aptos"/>
+                <a:latin typeface="Arial"/>
               </a:rPr>
               <a:t>l3-bgp-leaf-no-lag — lean BGP, no LAG</a:t>
             </a:r>
@@ -6762,7 +6743,7 @@
                 <a:solidFill>
                   <a:srgbClr val="34383D"/>
                 </a:solidFill>
-                <a:latin typeface="Aptos"/>
+                <a:latin typeface="Arial"/>
               </a:rPr>
               <a:t>l3-bgp-bfd-leaf — BGP + BFD detection</a:t>
             </a:r>
@@ -6775,7 +6756,7 @@
                 <a:solidFill>
                   <a:srgbClr val="34383D"/>
                 </a:solidFill>
-                <a:latin typeface="Aptos"/>
+                <a:latin typeface="Arial"/>
               </a:rPr>
               <a:t>l3-bgp-observability — BGP + monitoring</a:t>
             </a:r>
@@ -6788,24 +6769,11 @@
                 <a:solidFill>
                   <a:srgbClr val="34383D"/>
                 </a:solidFill>
-                <a:latin typeface="Aptos"/>
-              </a:rPr>
-              <a:t>l3-multirouting-lab — OSPF/PIM/PCEP daemons</a:t>
+                <a:latin typeface="Arial"/>
+              </a:rPr>
+              <a:t>l3-multirouting-lab — optional routing-daemon controls</a:t>
             </a:r>
             <a:endParaRPr lang="en-US" sz="1200"/>
-          </a:p>
-          <a:p>
-            <a:pPr algn="l"/>
-            <a:r>
-              <a:rPr lang="en-US" sz="1100" dirty="0" b="1">
-                <a:solidFill>
-                  <a:srgbClr val="009B77"/>
-                </a:solidFill>
-                <a:latin typeface="Aptos"/>
-              </a:rPr>
-              <a:t>Native CLI • persistence • FRR policy • scale study</a:t>
-            </a:r>
-            <a:endParaRPr lang="en-US" sz="1100"/>
           </a:p>
         </p:txBody>
       </p:sp>
@@ -6842,9 +6810,9 @@
                 <a:solidFill>
                   <a:srgbClr val="198FD3"/>
                 </a:solidFill>
-                <a:latin typeface="Aptos"/>
-              </a:rPr>
-              <a:t>PLANNED ENHANCEMENTS</a:t>
+                <a:latin typeface="Arial"/>
+              </a:rPr>
+              <a:t>DELIVERED IN SONiC</a:t>
             </a:r>
             <a:endParaRPr lang="en-US" sz="1200"/>
           </a:p>
@@ -6855,9 +6823,9 @@
                 <a:solidFill>
                   <a:srgbClr val="34383D"/>
                 </a:solidFill>
-                <a:latin typeface="Aptos"/>
-              </a:rPr>
-              <a:t>Recovery + automated qualification</a:t>
+                <a:latin typeface="Arial"/>
+              </a:rPr>
+              <a:t>One YAML. Two operating models.</a:t>
             </a:r>
             <a:endParaRPr lang="en-US" sz="1700"/>
           </a:p>
@@ -6868,37 +6836,37 @@
                 <a:solidFill>
                   <a:srgbClr val="34383D"/>
                 </a:solidFill>
-                <a:latin typeface="Aptos"/>
-              </a:rPr>
-              <a:t>Rollback • deeper dependency / health probes</a:t>
+                <a:latin typeface="Arial"/>
+              </a:rPr>
+              <a:t>Native CLI • persistence • manual rollback</a:t>
             </a:r>
             <a:endParaRPr lang="en-US" sz="1300"/>
           </a:p>
           <a:p>
             <a:pPr algn="l"/>
             <a:r>
-              <a:rPr lang="en-US" sz="1400" dirty="0">
+              <a:rPr lang="en-US" sz="1300" dirty="0">
                 <a:solidFill>
                   <a:srgbClr val="34383D"/>
                 </a:solidFill>
-                <a:latin typeface="Aptos"/>
-              </a:rPr>
-              <a:t>Artifact verification + integrated reporting</a:t>
-            </a:r>
-            <a:endParaRPr lang="en-US" sz="1400"/>
-          </a:p>
-          <a:p>
-            <a:pPr algn="l"/>
-            <a:r>
-              <a:rPr lang="en-US" sz="1400" dirty="0">
+                <a:latin typeface="Arial"/>
+              </a:rPr>
+              <a:t>Platform-independent persona contract</a:t>
+            </a:r>
+            <a:endParaRPr lang="en-US" sz="1300"/>
+          </a:p>
+          <a:p>
+            <a:pPr algn="l"/>
+            <a:r>
+              <a:rPr lang="en-US" sz="1300" dirty="0">
                 <a:solidFill>
                   <a:srgbClr val="34383D"/>
                 </a:solidFill>
-                <a:latin typeface="Aptos"/>
-              </a:rPr>
-              <a:t>More platforms + measured CVE assessment</a:t>
-            </a:r>
-            <a:endParaRPr lang="en-US" sz="1400"/>
+                <a:latin typeface="Arial"/>
+              </a:rPr>
+              <a:t>Real-device footprint + scale study</a:t>
+            </a:r>
+            <a:endParaRPr lang="en-US" sz="1300"/>
           </a:p>
         </p:txBody>
       </p:sp>
@@ -6933,7 +6901,7 @@
                 <a:solidFill>
                   <a:srgbClr val="009B77"/>
                 </a:solidFill>
-                <a:latin typeface="Aptos"/>
+                <a:latin typeface="Arial"/>
               </a:rPr>
               <a:t>STATUS: Completed</a:t>
             </a:r>
@@ -6946,7 +6914,7 @@
                 <a:solidFill>
                   <a:srgbClr val="687985"/>
                 </a:solidFill>
-                <a:latin typeface="Aptos"/>
+                <a:latin typeface="Arial"/>
               </a:rPr>
               <a:t>Hackathon scope: build + runtime implemented and demonstrated</a:t>
             </a:r>
@@ -6983,7 +6951,7 @@
                 <a:solidFill>
                   <a:srgbClr val="687985"/>
                 </a:solidFill>
-                <a:latin typeface="Aptos"/>
+                <a:latin typeface="Arial"/>
                 <a:hlinkClick r:id="rId3"/>
               </a:rPr>
               <a:t>BUILD + RUNTIME CORE</a:t>
@@ -6997,7 +6965,7 @@
                 <a:solidFill>
                   <a:srgbClr val="198FD3"/>
                 </a:solidFill>
-                <a:latin typeface="Aptos"/>
+                <a:latin typeface="Arial"/>
                 <a:hlinkClick r:id="rId3"/>
               </a:rPr>
               <a:t>github.com/mh-csonic/sonic-buildimage</a:t>
@@ -7035,7 +7003,7 @@
                 <a:solidFill>
                   <a:srgbClr val="687985"/>
                 </a:solidFill>
-                <a:latin typeface="Aptos"/>
+                <a:latin typeface="Arial"/>
                 <a:hlinkClick r:id="rId4"/>
               </a:rPr>
               <a:t>NATIVE SONiC CLI</a:t>
@@ -7049,7 +7017,7 @@
                 <a:solidFill>
                   <a:srgbClr val="198FD3"/>
                 </a:solidFill>
-                <a:latin typeface="Aptos"/>
+                <a:latin typeface="Arial"/>
                 <a:hlinkClick r:id="rId4"/>
               </a:rPr>
               <a:t>github.com/mh-csonic/sonic-utilities</a:t>
@@ -7087,7 +7055,7 @@
                 <a:solidFill>
                   <a:srgbClr val="687985"/>
                 </a:solidFill>
-                <a:latin typeface="Aptos"/>
+                <a:latin typeface="Arial"/>
               </a:rPr>
               <a:t>Source branch: rathnasabapathyv/2026_hackathon_persona</a:t>
             </a:r>
@@ -7124,7 +7092,7 @@
                 <a:solidFill>
                   <a:srgbClr val="198FD3"/>
                 </a:solidFill>
-                <a:latin typeface="Aptos"/>
+                <a:latin typeface="Arial"/>
                 <a:hlinkClick r:id="rId5"/>
               </a:rPr>
               <a:t>Open the study, HLD and requirements →</a:t>
@@ -7184,14 +7152,14 @@
     </a:clrScheme>
     <a:fontScheme name="Helvetica Neue">
       <a:majorFont>
-        <a:latin typeface="Helvetica Neue"/>
-        <a:ea typeface=""/>
-        <a:cs typeface=""/>
+        <a:latin typeface="Arial"/>
+        <a:ea typeface="Arial"/>
+        <a:cs typeface="Arial"/>
       </a:majorFont>
       <a:minorFont>
-        <a:latin typeface="Helvetica Neue"/>
-        <a:ea typeface=""/>
-        <a:cs typeface=""/>
+        <a:latin typeface="Arial"/>
+        <a:ea typeface="Arial"/>
+        <a:cs typeface="Arial"/>
       </a:minorFont>
     </a:fontScheme>
     <a:fmtScheme name="Office">
@@ -7405,108 +7373,108 @@
     </a:clrScheme>
     <a:fontScheme name="Office">
       <a:majorFont>
-        <a:latin typeface="Aptos Display" panose="02110004020202020204"/>
-        <a:ea typeface=""/>
-        <a:cs typeface=""/>
-        <a:font script="Jpan" typeface="游ゴシック Light"/>
-        <a:font script="Hang" typeface="맑은 고딕"/>
-        <a:font script="Hans" typeface="等线 Light"/>
-        <a:font script="Hant" typeface="新細明體"/>
-        <a:font script="Arab" typeface="Times New Roman"/>
-        <a:font script="Hebr" typeface="Times New Roman"/>
-        <a:font script="Thai" typeface="Angsana New"/>
-        <a:font script="Ethi" typeface="Nyala"/>
-        <a:font script="Beng" typeface="Vrinda"/>
-        <a:font script="Gujr" typeface="Shruti"/>
-        <a:font script="Khmr" typeface="MoolBoran"/>
-        <a:font script="Knda" typeface="Tunga"/>
-        <a:font script="Guru" typeface="Raavi"/>
-        <a:font script="Cans" typeface="Euphemia"/>
-        <a:font script="Cher" typeface="Plantagenet Cherokee"/>
-        <a:font script="Yiii" typeface="Microsoft Yi Baiti"/>
-        <a:font script="Tibt" typeface="Microsoft Himalaya"/>
-        <a:font script="Thaa" typeface="MV Boli"/>
-        <a:font script="Deva" typeface="Mangal"/>
-        <a:font script="Telu" typeface="Gautami"/>
-        <a:font script="Taml" typeface="Latha"/>
-        <a:font script="Syrc" typeface="Estrangelo Edessa"/>
-        <a:font script="Orya" typeface="Kalinga"/>
-        <a:font script="Mlym" typeface="Kartika"/>
-        <a:font script="Laoo" typeface="DokChampa"/>
-        <a:font script="Sinh" typeface="Iskoola Pota"/>
-        <a:font script="Mong" typeface="Mongolian Baiti"/>
-        <a:font script="Viet" typeface="Times New Roman"/>
-        <a:font script="Uigh" typeface="Microsoft Uighur"/>
-        <a:font script="Geor" typeface="Sylfaen"/>
+        <a:latin typeface="Arial"/>
+        <a:ea typeface="Arial"/>
+        <a:cs typeface="Arial"/>
+        <a:font script="Jpan" typeface="Arial"/>
+        <a:font script="Hang" typeface="Arial"/>
+        <a:font script="Hans" typeface="Arial"/>
+        <a:font script="Hant" typeface="Arial"/>
+        <a:font script="Arab" typeface="Arial"/>
+        <a:font script="Hebr" typeface="Arial"/>
+        <a:font script="Thai" typeface="Arial"/>
+        <a:font script="Ethi" typeface="Arial"/>
+        <a:font script="Beng" typeface="Arial"/>
+        <a:font script="Gujr" typeface="Arial"/>
+        <a:font script="Khmr" typeface="Arial"/>
+        <a:font script="Knda" typeface="Arial"/>
+        <a:font script="Guru" typeface="Arial"/>
+        <a:font script="Cans" typeface="Arial"/>
+        <a:font script="Cher" typeface="Arial"/>
+        <a:font script="Yiii" typeface="Arial"/>
+        <a:font script="Tibt" typeface="Arial"/>
+        <a:font script="Thaa" typeface="Arial"/>
+        <a:font script="Deva" typeface="Arial"/>
+        <a:font script="Telu" typeface="Arial"/>
+        <a:font script="Taml" typeface="Arial"/>
+        <a:font script="Syrc" typeface="Arial"/>
+        <a:font script="Orya" typeface="Arial"/>
+        <a:font script="Mlym" typeface="Arial"/>
+        <a:font script="Laoo" typeface="Arial"/>
+        <a:font script="Sinh" typeface="Arial"/>
+        <a:font script="Mong" typeface="Arial"/>
+        <a:font script="Viet" typeface="Arial"/>
+        <a:font script="Uigh" typeface="Arial"/>
+        <a:font script="Geor" typeface="Arial"/>
         <a:font script="Armn" typeface="Arial"/>
-        <a:font script="Bugi" typeface="Leelawadee UI"/>
-        <a:font script="Bopo" typeface="Microsoft JhengHei"/>
-        <a:font script="Java" typeface="Javanese Text"/>
-        <a:font script="Lisu" typeface="Segoe UI"/>
-        <a:font script="Mymr" typeface="Myanmar Text"/>
-        <a:font script="Nkoo" typeface="Ebrima"/>
-        <a:font script="Olck" typeface="Nirmala UI"/>
-        <a:font script="Osma" typeface="Ebrima"/>
-        <a:font script="Phag" typeface="Phagspa"/>
-        <a:font script="Syrn" typeface="Estrangelo Edessa"/>
-        <a:font script="Syrj" typeface="Estrangelo Edessa"/>
-        <a:font script="Syre" typeface="Estrangelo Edessa"/>
-        <a:font script="Sora" typeface="Nirmala UI"/>
-        <a:font script="Tale" typeface="Microsoft Tai Le"/>
-        <a:font script="Talu" typeface="Microsoft New Tai Lue"/>
-        <a:font script="Tfng" typeface="Ebrima"/>
+        <a:font script="Bugi" typeface="Arial"/>
+        <a:font script="Bopo" typeface="Arial"/>
+        <a:font script="Java" typeface="Arial"/>
+        <a:font script="Lisu" typeface="Arial"/>
+        <a:font script="Mymr" typeface="Arial"/>
+        <a:font script="Nkoo" typeface="Arial"/>
+        <a:font script="Olck" typeface="Arial"/>
+        <a:font script="Osma" typeface="Arial"/>
+        <a:font script="Phag" typeface="Arial"/>
+        <a:font script="Syrn" typeface="Arial"/>
+        <a:font script="Syrj" typeface="Arial"/>
+        <a:font script="Syre" typeface="Arial"/>
+        <a:font script="Sora" typeface="Arial"/>
+        <a:font script="Tale" typeface="Arial"/>
+        <a:font script="Talu" typeface="Arial"/>
+        <a:font script="Tfng" typeface="Arial"/>
       </a:majorFont>
       <a:minorFont>
-        <a:latin typeface="Aptos" panose="02110004020202020204"/>
-        <a:ea typeface=""/>
-        <a:cs typeface=""/>
-        <a:font script="Jpan" typeface="游ゴシック"/>
-        <a:font script="Hang" typeface="맑은 고딕"/>
-        <a:font script="Hans" typeface="等线"/>
-        <a:font script="Hant" typeface="新細明體"/>
+        <a:latin typeface="Arial"/>
+        <a:ea typeface="Arial"/>
+        <a:cs typeface="Arial"/>
+        <a:font script="Jpan" typeface="Arial"/>
+        <a:font script="Hang" typeface="Arial"/>
+        <a:font script="Hans" typeface="Arial"/>
+        <a:font script="Hant" typeface="Arial"/>
         <a:font script="Arab" typeface="Arial"/>
         <a:font script="Hebr" typeface="Arial"/>
-        <a:font script="Thai" typeface="Cordia New"/>
-        <a:font script="Ethi" typeface="Nyala"/>
-        <a:font script="Beng" typeface="Vrinda"/>
-        <a:font script="Gujr" typeface="Shruti"/>
-        <a:font script="Khmr" typeface="DaunPenh"/>
-        <a:font script="Knda" typeface="Tunga"/>
-        <a:font script="Guru" typeface="Raavi"/>
-        <a:font script="Cans" typeface="Euphemia"/>
-        <a:font script="Cher" typeface="Plantagenet Cherokee"/>
-        <a:font script="Yiii" typeface="Microsoft Yi Baiti"/>
-        <a:font script="Tibt" typeface="Microsoft Himalaya"/>
-        <a:font script="Thaa" typeface="MV Boli"/>
-        <a:font script="Deva" typeface="Mangal"/>
-        <a:font script="Telu" typeface="Gautami"/>
-        <a:font script="Taml" typeface="Latha"/>
-        <a:font script="Syrc" typeface="Estrangelo Edessa"/>
-        <a:font script="Orya" typeface="Kalinga"/>
-        <a:font script="Mlym" typeface="Kartika"/>
-        <a:font script="Laoo" typeface="DokChampa"/>
-        <a:font script="Sinh" typeface="Iskoola Pota"/>
-        <a:font script="Mong" typeface="Mongolian Baiti"/>
+        <a:font script="Thai" typeface="Arial"/>
+        <a:font script="Ethi" typeface="Arial"/>
+        <a:font script="Beng" typeface="Arial"/>
+        <a:font script="Gujr" typeface="Arial"/>
+        <a:font script="Khmr" typeface="Arial"/>
+        <a:font script="Knda" typeface="Arial"/>
+        <a:font script="Guru" typeface="Arial"/>
+        <a:font script="Cans" typeface="Arial"/>
+        <a:font script="Cher" typeface="Arial"/>
+        <a:font script="Yiii" typeface="Arial"/>
+        <a:font script="Tibt" typeface="Arial"/>
+        <a:font script="Thaa" typeface="Arial"/>
+        <a:font script="Deva" typeface="Arial"/>
+        <a:font script="Telu" typeface="Arial"/>
+        <a:font script="Taml" typeface="Arial"/>
+        <a:font script="Syrc" typeface="Arial"/>
+        <a:font script="Orya" typeface="Arial"/>
+        <a:font script="Mlym" typeface="Arial"/>
+        <a:font script="Laoo" typeface="Arial"/>
+        <a:font script="Sinh" typeface="Arial"/>
+        <a:font script="Mong" typeface="Arial"/>
         <a:font script="Viet" typeface="Arial"/>
-        <a:font script="Uigh" typeface="Microsoft Uighur"/>
-        <a:font script="Geor" typeface="Sylfaen"/>
+        <a:font script="Uigh" typeface="Arial"/>
+        <a:font script="Geor" typeface="Arial"/>
         <a:font script="Armn" typeface="Arial"/>
-        <a:font script="Bugi" typeface="Leelawadee UI"/>
-        <a:font script="Bopo" typeface="Microsoft JhengHei"/>
-        <a:font script="Java" typeface="Javanese Text"/>
-        <a:font script="Lisu" typeface="Segoe UI"/>
-        <a:font script="Mymr" typeface="Myanmar Text"/>
-        <a:font script="Nkoo" typeface="Ebrima"/>
-        <a:font script="Olck" typeface="Nirmala UI"/>
-        <a:font script="Osma" typeface="Ebrima"/>
-        <a:font script="Phag" typeface="Phagspa"/>
-        <a:font script="Syrn" typeface="Estrangelo Edessa"/>
-        <a:font script="Syrj" typeface="Estrangelo Edessa"/>
-        <a:font script="Syre" typeface="Estrangelo Edessa"/>
-        <a:font script="Sora" typeface="Nirmala UI"/>
-        <a:font script="Tale" typeface="Microsoft Tai Le"/>
-        <a:font script="Talu" typeface="Microsoft New Tai Lue"/>
-        <a:font script="Tfng" typeface="Ebrima"/>
+        <a:font script="Bugi" typeface="Arial"/>
+        <a:font script="Bopo" typeface="Arial"/>
+        <a:font script="Java" typeface="Arial"/>
+        <a:font script="Lisu" typeface="Arial"/>
+        <a:font script="Mymr" typeface="Arial"/>
+        <a:font script="Nkoo" typeface="Arial"/>
+        <a:font script="Olck" typeface="Arial"/>
+        <a:font script="Osma" typeface="Arial"/>
+        <a:font script="Phag" typeface="Arial"/>
+        <a:font script="Syrn" typeface="Arial"/>
+        <a:font script="Syrj" typeface="Arial"/>
+        <a:font script="Syre" typeface="Arial"/>
+        <a:font script="Sora" typeface="Arial"/>
+        <a:font script="Tale" typeface="Arial"/>
+        <a:font script="Talu" typeface="Arial"/>
+        <a:font script="Tfng" typeface="Arial"/>
       </a:minorFont>
     </a:fontScheme>
     <a:fmtScheme name="Office">
